--- a/CLLE_PRESENTATION.pptx
+++ b/CLLE_PRESENTATION.pptx
@@ -20,7 +20,7 @@
     <p:sldId id="268" r:id="rId14"/>
     <p:sldId id="269" r:id="rId15"/>
   </p:sldIdLst>
-  <p:sldSz cx="12192000" cy="6858000"/>
+  <p:sldSz cx="12191695" cy="6858000"/>
   <p:notesSz cx="6858000" cy="9144000"/>
   <p:defaultTextStyle>
     <a:defPPr>
@@ -167,6 +167,7 @@
               <a:rPr lang="en-US" dirty="0"/>
               <a:t>Click to edit Master title style</a:t>
             </a:r>
+            <a:endParaRPr lang="en-US" dirty="0"/>
           </a:p>
         </p:txBody>
       </p:sp>
@@ -286,6 +287,7 @@
               <a:rPr lang="en-US" dirty="0"/>
               <a:t>Click to edit Master subtitle style</a:t>
             </a:r>
+            <a:endParaRPr lang="en-US" dirty="0"/>
           </a:p>
         </p:txBody>
       </p:sp>
@@ -307,7 +309,7 @@
             <a:fld id="{B61BEF0D-F0BB-DE4B-95CE-6DB70DBA9567}" type="datetimeFigureOut">
               <a:rPr lang="en-US" dirty="0"/>
               <a:pPr/>
-              <a:t>4/2/26</a:t>
+              <a:t>1/1/2000</a:t>
             </a:fld>
             <a:endParaRPr lang="en-US" dirty="0"/>
           </a:p>
@@ -335,7 +337,8 @@
       <p:sp>
         <p:nvSpPr>
           <p:cNvPr id="7" name="Freeform 6"/>
-          <p:cNvSpPr/>
+          <p:cNvSpPr>
+          </p:cNvSpPr>
           <p:nvPr/>
         </p:nvSpPr>
         <p:spPr bwMode="auto">
@@ -344,10 +347,6 @@
             <a:ext cx="1744652" cy="778589"/>
           </a:xfrm>
           <a:custGeom>
-            <a:avLst/>
-            <a:gdLst/>
-            <a:ahLst/>
-            <a:cxnLst/>
             <a:rect l="0" t="0" r="r" b="b"/>
             <a:pathLst>
               <a:path w="372" h="166">
@@ -435,7 +434,7 @@
           <a:lstStyle/>
           <a:p>
             <a:fld id="{D57F1E4F-1CFF-5643-939E-217C01CDF565}" type="slidenum">
-              <a:rPr lang="en-US" dirty="0"/>
+              <a:rPr dirty="0" lang="en-US"/>
               <a:pPr/>
               <a:t>‹#›</a:t>
             </a:fld>
@@ -498,6 +497,7 @@
               <a:rPr lang="en-US" dirty="0"/>
               <a:t>Click to edit Master title style</a:t>
             </a:r>
+            <a:endParaRPr lang="en-US" dirty="0"/>
           </a:p>
         </p:txBody>
       </p:sp>
@@ -641,7 +641,7 @@
             <a:fld id="{B61BEF0D-F0BB-DE4B-95CE-6DB70DBA9567}" type="datetimeFigureOut">
               <a:rPr lang="en-US" dirty="0"/>
               <a:pPr/>
-              <a:t>4/2/26</a:t>
+              <a:t>1/1/2000</a:t>
             </a:fld>
             <a:endParaRPr lang="en-US" dirty="0"/>
           </a:p>
@@ -669,7 +669,8 @@
       <p:sp>
         <p:nvSpPr>
           <p:cNvPr id="9" name="Freeform 11"/>
-          <p:cNvSpPr/>
+          <p:cNvSpPr>
+          </p:cNvSpPr>
           <p:nvPr/>
         </p:nvSpPr>
         <p:spPr bwMode="auto">
@@ -678,10 +679,6 @@
             <a:ext cx="1588527" cy="507297"/>
           </a:xfrm>
           <a:custGeom>
-            <a:avLst/>
-            <a:gdLst/>
-            <a:ahLst/>
-            <a:cxnLst/>
             <a:rect l="l" t="t" r="r" b="b"/>
             <a:pathLst>
               <a:path w="9248" h="10000">
@@ -769,7 +766,7 @@
           <a:lstStyle/>
           <a:p>
             <a:fld id="{D57F1E4F-1CFF-5643-939E-217C01CDF565}" type="slidenum">
-              <a:rPr lang="en-US" dirty="0"/>
+              <a:rPr dirty="0" lang="en-US"/>
               <a:pPr/>
               <a:t>‹#›</a:t>
             </a:fld>
@@ -832,6 +829,7 @@
               <a:rPr lang="en-US" dirty="0"/>
               <a:t>Click to edit Master title style</a:t>
             </a:r>
+            <a:endParaRPr lang="en-US" dirty="0"/>
           </a:p>
         </p:txBody>
       </p:sp>
@@ -1038,7 +1036,7 @@
             <a:fld id="{B61BEF0D-F0BB-DE4B-95CE-6DB70DBA9567}" type="datetimeFigureOut">
               <a:rPr lang="en-US" dirty="0"/>
               <a:pPr/>
-              <a:t>4/2/26</a:t>
+              <a:t>1/1/2000</a:t>
             </a:fld>
             <a:endParaRPr lang="en-US" dirty="0"/>
           </a:p>
@@ -1066,7 +1064,8 @@
       <p:sp>
         <p:nvSpPr>
           <p:cNvPr id="11" name="Freeform 11"/>
-          <p:cNvSpPr/>
+          <p:cNvSpPr>
+          </p:cNvSpPr>
           <p:nvPr/>
         </p:nvSpPr>
         <p:spPr bwMode="auto">
@@ -1075,10 +1074,6 @@
             <a:ext cx="1588527" cy="507297"/>
           </a:xfrm>
           <a:custGeom>
-            <a:avLst/>
-            <a:gdLst/>
-            <a:ahLst/>
-            <a:cxnLst/>
             <a:rect l="l" t="t" r="r" b="b"/>
             <a:pathLst>
               <a:path w="9248" h="10000">
@@ -1166,7 +1161,7 @@
           <a:lstStyle/>
           <a:p>
             <a:fld id="{D57F1E4F-1CFF-5643-939E-217C01CDF565}" type="slidenum">
-              <a:rPr lang="en-US" dirty="0"/>
+              <a:rPr dirty="0" lang="en-US"/>
               <a:pPr/>
               <a:t>‹#›</a:t>
             </a:fld>
@@ -1186,7 +1181,6 @@
             <a:ext cx="609600" cy="584776"/>
           </a:xfrm>
           <a:prstGeom prst="rect">
-            <a:avLst/>
           </a:prstGeom>
         </p:spPr>
         <p:txBody>
@@ -1209,6 +1203,16 @@
               </a:rPr>
               <a:t>“</a:t>
             </a:r>
+            <a:endParaRPr lang="en-US" sz="8000" baseline="0" dirty="0">
+              <a:ln w="3175" cmpd="sng">
+                <a:noFill/>
+              </a:ln>
+              <a:solidFill>
+                <a:schemeClr val="accent1"/>
+              </a:solidFill>
+              <a:effectLst/>
+              <a:latin typeface="Arial"/>
+            </a:endParaRPr>
           </a:p>
         </p:txBody>
       </p:sp>
@@ -1224,7 +1228,6 @@
             <a:ext cx="609600" cy="584776"/>
           </a:xfrm>
           <a:prstGeom prst="rect">
-            <a:avLst/>
           </a:prstGeom>
         </p:spPr>
         <p:txBody>
@@ -1247,6 +1250,16 @@
               </a:rPr>
               <a:t>”</a:t>
             </a:r>
+            <a:endParaRPr lang="en-US" sz="8000" baseline="0" dirty="0">
+              <a:ln w="3175" cmpd="sng">
+                <a:noFill/>
+              </a:ln>
+              <a:solidFill>
+                <a:schemeClr val="accent1"/>
+              </a:solidFill>
+              <a:effectLst/>
+              <a:latin typeface="Arial"/>
+            </a:endParaRPr>
           </a:p>
         </p:txBody>
       </p:sp>
@@ -1305,6 +1318,7 @@
               <a:rPr lang="en-US" dirty="0"/>
               <a:t>Click to edit Master title style</a:t>
             </a:r>
+            <a:endParaRPr lang="en-US" dirty="0"/>
           </a:p>
         </p:txBody>
       </p:sp>
@@ -1370,7 +1384,7 @@
             <a:fld id="{B61BEF0D-F0BB-DE4B-95CE-6DB70DBA9567}" type="datetimeFigureOut">
               <a:rPr lang="en-US" dirty="0"/>
               <a:pPr/>
-              <a:t>4/2/26</a:t>
+              <a:t>1/1/2000</a:t>
             </a:fld>
             <a:endParaRPr lang="en-US" dirty="0"/>
           </a:p>
@@ -1398,7 +1412,8 @@
       <p:sp>
         <p:nvSpPr>
           <p:cNvPr id="9" name="Freeform 11"/>
-          <p:cNvSpPr/>
+          <p:cNvSpPr>
+          </p:cNvSpPr>
           <p:nvPr/>
         </p:nvSpPr>
         <p:spPr bwMode="auto">
@@ -1407,10 +1422,6 @@
             <a:ext cx="1588527" cy="507297"/>
           </a:xfrm>
           <a:custGeom>
-            <a:avLst/>
-            <a:gdLst/>
-            <a:ahLst/>
-            <a:cxnLst/>
             <a:rect l="l" t="t" r="r" b="b"/>
             <a:pathLst>
               <a:path w="9248" h="10000">
@@ -1498,7 +1509,7 @@
           <a:lstStyle/>
           <a:p>
             <a:fld id="{D57F1E4F-1CFF-5643-939E-217C01CDF565}" type="slidenum">
-              <a:rPr lang="en-US" dirty="0"/>
+              <a:rPr dirty="0" lang="en-US"/>
               <a:pPr/>
               <a:t>‹#›</a:t>
             </a:fld>
@@ -1561,6 +1572,7 @@
               <a:rPr lang="en-US" dirty="0"/>
               <a:t>Click to edit Master title style</a:t>
             </a:r>
+            <a:endParaRPr lang="en-US" dirty="0"/>
           </a:p>
         </p:txBody>
       </p:sp>
@@ -1686,7 +1698,7 @@
             <a:fld id="{B61BEF0D-F0BB-DE4B-95CE-6DB70DBA9567}" type="datetimeFigureOut">
               <a:rPr lang="en-US" dirty="0"/>
               <a:pPr/>
-              <a:t>4/2/26</a:t>
+              <a:t>1/1/2000</a:t>
             </a:fld>
             <a:endParaRPr lang="en-US" dirty="0"/>
           </a:p>
@@ -1714,7 +1726,8 @@
       <p:sp>
         <p:nvSpPr>
           <p:cNvPr id="11" name="Freeform 11"/>
-          <p:cNvSpPr/>
+          <p:cNvSpPr>
+          </p:cNvSpPr>
           <p:nvPr/>
         </p:nvSpPr>
         <p:spPr bwMode="auto">
@@ -1723,10 +1736,6 @@
             <a:ext cx="1588527" cy="507297"/>
           </a:xfrm>
           <a:custGeom>
-            <a:avLst/>
-            <a:gdLst/>
-            <a:ahLst/>
-            <a:cxnLst/>
             <a:rect l="l" t="t" r="r" b="b"/>
             <a:pathLst>
               <a:path w="9248" h="10000">
@@ -1814,7 +1823,7 @@
           <a:lstStyle/>
           <a:p>
             <a:fld id="{D57F1E4F-1CFF-5643-939E-217C01CDF565}" type="slidenum">
-              <a:rPr lang="en-US" dirty="0"/>
+              <a:rPr dirty="0" lang="en-US"/>
               <a:pPr/>
               <a:t>‹#›</a:t>
             </a:fld>
@@ -1834,7 +1843,6 @@
             <a:ext cx="609600" cy="584776"/>
           </a:xfrm>
           <a:prstGeom prst="rect">
-            <a:avLst/>
           </a:prstGeom>
         </p:spPr>
         <p:txBody>
@@ -1857,6 +1865,16 @@
               </a:rPr>
               <a:t>“</a:t>
             </a:r>
+            <a:endParaRPr lang="en-US" sz="8000" baseline="0" dirty="0">
+              <a:ln w="3175" cmpd="sng">
+                <a:noFill/>
+              </a:ln>
+              <a:solidFill>
+                <a:schemeClr val="accent1"/>
+              </a:solidFill>
+              <a:effectLst/>
+              <a:latin typeface="Arial"/>
+            </a:endParaRPr>
           </a:p>
         </p:txBody>
       </p:sp>
@@ -1872,7 +1890,6 @@
             <a:ext cx="609600" cy="584776"/>
           </a:xfrm>
           <a:prstGeom prst="rect">
-            <a:avLst/>
           </a:prstGeom>
         </p:spPr>
         <p:txBody>
@@ -1895,6 +1912,16 @@
               </a:rPr>
               <a:t>”</a:t>
             </a:r>
+            <a:endParaRPr lang="en-US" sz="8000" baseline="0" dirty="0">
+              <a:ln w="3175" cmpd="sng">
+                <a:noFill/>
+              </a:ln>
+              <a:solidFill>
+                <a:schemeClr val="accent1"/>
+              </a:solidFill>
+              <a:effectLst/>
+              <a:latin typeface="Arial"/>
+            </a:endParaRPr>
           </a:p>
         </p:txBody>
       </p:sp>
@@ -1953,6 +1980,7 @@
               <a:rPr lang="en-US" dirty="0"/>
               <a:t>Click to edit Master title style</a:t>
             </a:r>
+            <a:endParaRPr lang="en-US" dirty="0"/>
           </a:p>
         </p:txBody>
       </p:sp>
@@ -2078,7 +2106,7 @@
             <a:fld id="{B61BEF0D-F0BB-DE4B-95CE-6DB70DBA9567}" type="datetimeFigureOut">
               <a:rPr lang="en-US" dirty="0"/>
               <a:pPr/>
-              <a:t>4/2/26</a:t>
+              <a:t>1/1/2000</a:t>
             </a:fld>
             <a:endParaRPr lang="en-US" dirty="0"/>
           </a:p>
@@ -2106,7 +2134,8 @@
       <p:sp>
         <p:nvSpPr>
           <p:cNvPr id="9" name="Freeform 11"/>
-          <p:cNvSpPr/>
+          <p:cNvSpPr>
+          </p:cNvSpPr>
           <p:nvPr/>
         </p:nvSpPr>
         <p:spPr bwMode="auto">
@@ -2115,10 +2144,6 @@
             <a:ext cx="1588527" cy="507297"/>
           </a:xfrm>
           <a:custGeom>
-            <a:avLst/>
-            <a:gdLst/>
-            <a:ahLst/>
-            <a:cxnLst/>
             <a:rect l="l" t="t" r="r" b="b"/>
             <a:pathLst>
               <a:path w="9248" h="10000">
@@ -2206,7 +2231,7 @@
           <a:lstStyle/>
           <a:p>
             <a:fld id="{D57F1E4F-1CFF-5643-939E-217C01CDF565}" type="slidenum">
-              <a:rPr lang="en-US" dirty="0"/>
+              <a:rPr dirty="0" lang="en-US"/>
               <a:pPr/>
               <a:t>‹#›</a:t>
             </a:fld>
@@ -2258,6 +2283,7 @@
               <a:rPr lang="en-US" dirty="0"/>
               <a:t>Click to edit Master title style</a:t>
             </a:r>
+            <a:endParaRPr lang="en-US" dirty="0"/>
           </a:p>
         </p:txBody>
       </p:sp>
@@ -2309,6 +2335,7 @@
               <a:rPr lang="en-US" dirty="0"/>
               <a:t>Fifth level</a:t>
             </a:r>
+            <a:endParaRPr lang="en-US" dirty="0"/>
           </a:p>
         </p:txBody>
       </p:sp>
@@ -2330,7 +2357,7 @@
             <a:fld id="{B61BEF0D-F0BB-DE4B-95CE-6DB70DBA9567}" type="datetimeFigureOut">
               <a:rPr lang="en-US" dirty="0"/>
               <a:pPr/>
-              <a:t>4/2/26</a:t>
+              <a:t>1/1/2000</a:t>
             </a:fld>
             <a:endParaRPr lang="en-US" dirty="0"/>
           </a:p>
@@ -2358,7 +2385,8 @@
       <p:sp>
         <p:nvSpPr>
           <p:cNvPr id="8" name="Freeform 11"/>
-          <p:cNvSpPr/>
+          <p:cNvSpPr>
+          </p:cNvSpPr>
           <p:nvPr/>
         </p:nvSpPr>
         <p:spPr bwMode="auto">
@@ -2367,10 +2395,6 @@
             <a:ext cx="1588527" cy="507297"/>
           </a:xfrm>
           <a:custGeom>
-            <a:avLst/>
-            <a:gdLst/>
-            <a:ahLst/>
-            <a:cxnLst/>
             <a:rect l="l" t="t" r="r" b="b"/>
             <a:pathLst>
               <a:path w="9248" h="10000">
@@ -2453,7 +2477,7 @@
           <a:lstStyle/>
           <a:p>
             <a:fld id="{D57F1E4F-1CFF-5643-939E-217C01CDF565}" type="slidenum">
-              <a:rPr lang="en-US" dirty="0"/>
+              <a:rPr dirty="0" lang="en-US"/>
               <a:pPr/>
               <a:t>‹#›</a:t>
             </a:fld>
@@ -2510,6 +2534,7 @@
               <a:rPr lang="en-US" dirty="0"/>
               <a:t>Click to edit Master title style</a:t>
             </a:r>
+            <a:endParaRPr lang="en-US" dirty="0"/>
           </a:p>
         </p:txBody>
       </p:sp>
@@ -2566,6 +2591,7 @@
               <a:rPr lang="en-US" dirty="0"/>
               <a:t>Fifth level</a:t>
             </a:r>
+            <a:endParaRPr lang="en-US" dirty="0"/>
           </a:p>
         </p:txBody>
       </p:sp>
@@ -2587,7 +2613,7 @@
             <a:fld id="{B61BEF0D-F0BB-DE4B-95CE-6DB70DBA9567}" type="datetimeFigureOut">
               <a:rPr lang="en-US" dirty="0"/>
               <a:pPr/>
-              <a:t>4/2/26</a:t>
+              <a:t>1/1/2000</a:t>
             </a:fld>
             <a:endParaRPr lang="en-US" dirty="0"/>
           </a:p>
@@ -2615,7 +2641,8 @@
       <p:sp>
         <p:nvSpPr>
           <p:cNvPr id="8" name="Freeform 11"/>
-          <p:cNvSpPr/>
+          <p:cNvSpPr>
+          </p:cNvSpPr>
           <p:nvPr/>
         </p:nvSpPr>
         <p:spPr bwMode="auto">
@@ -2624,10 +2651,6 @@
             <a:ext cx="1588527" cy="507297"/>
           </a:xfrm>
           <a:custGeom>
-            <a:avLst/>
-            <a:gdLst/>
-            <a:ahLst/>
-            <a:cxnLst/>
             <a:rect l="l" t="t" r="r" b="b"/>
             <a:pathLst>
               <a:path w="9248" h="10000">
@@ -2710,7 +2733,7 @@
           <a:lstStyle/>
           <a:p>
             <a:fld id="{D57F1E4F-1CFF-5643-939E-217C01CDF565}" type="slidenum">
-              <a:rPr lang="en-US" dirty="0"/>
+              <a:rPr dirty="0" lang="en-US"/>
               <a:pPr/>
               <a:t>‹#›</a:t>
             </a:fld>
@@ -2767,6 +2790,7 @@
               <a:rPr lang="en-US" dirty="0"/>
               <a:t>Click to edit Master title style</a:t>
             </a:r>
+            <a:endParaRPr lang="en-US" dirty="0"/>
           </a:p>
         </p:txBody>
       </p:sp>
@@ -2823,6 +2847,7 @@
               <a:rPr lang="en-US" dirty="0"/>
               <a:t>Fifth level</a:t>
             </a:r>
+            <a:endParaRPr lang="en-US" dirty="0"/>
           </a:p>
         </p:txBody>
       </p:sp>
@@ -2844,7 +2869,7 @@
             <a:fld id="{B61BEF0D-F0BB-DE4B-95CE-6DB70DBA9567}" type="datetimeFigureOut">
               <a:rPr lang="en-US" dirty="0"/>
               <a:pPr/>
-              <a:t>4/2/26</a:t>
+              <a:t>1/1/2000</a:t>
             </a:fld>
             <a:endParaRPr lang="en-US" dirty="0"/>
           </a:p>
@@ -2872,7 +2897,8 @@
       <p:sp>
         <p:nvSpPr>
           <p:cNvPr id="8" name="Freeform 11"/>
-          <p:cNvSpPr/>
+          <p:cNvSpPr>
+          </p:cNvSpPr>
           <p:nvPr/>
         </p:nvSpPr>
         <p:spPr bwMode="auto">
@@ -2881,10 +2907,6 @@
             <a:ext cx="1588527" cy="507297"/>
           </a:xfrm>
           <a:custGeom>
-            <a:avLst/>
-            <a:gdLst/>
-            <a:ahLst/>
-            <a:cxnLst/>
             <a:rect l="l" t="t" r="r" b="b"/>
             <a:pathLst>
               <a:path w="9248" h="10000">
@@ -2950,31 +2972,24 @@
             <a:noFill/>
           </a:ln>
         </p:spPr>
+      </p:sp>
+      <p:sp>
+        <p:nvSpPr>
+          <p:cNvPr id="6" name="Slide Number Placeholder 5"/>
+          <p:cNvSpPr>
+            <a:spLocks noGrp="1"/>
+          </p:cNvSpPr>
+          <p:nvPr>
+            <p:ph type="sldNum" sz="quarter" idx="12"/>
+          </p:nvPr>
+        </p:nvSpPr>
+        <p:spPr/>
         <p:txBody>
           <a:bodyPr/>
           <a:lstStyle/>
           <a:p>
-            <a:endParaRPr lang="en-US"/>
-          </a:p>
-        </p:txBody>
-      </p:sp>
-      <p:sp>
-        <p:nvSpPr>
-          <p:cNvPr id="6" name="Slide Number Placeholder 5"/>
-          <p:cNvSpPr>
-            <a:spLocks noGrp="1"/>
-          </p:cNvSpPr>
-          <p:nvPr>
-            <p:ph type="sldNum" sz="quarter" idx="12"/>
-          </p:nvPr>
-        </p:nvSpPr>
-        <p:spPr/>
-        <p:txBody>
-          <a:bodyPr/>
-          <a:lstStyle/>
-          <a:p>
             <a:fld id="{D57F1E4F-1CFF-5643-939E-217C01CDF565}" type="slidenum">
-              <a:rPr lang="en-US" dirty="0"/>
+              <a:rPr dirty="0" lang="en-US"/>
               <a:pPr/>
               <a:t>‹#›</a:t>
             </a:fld>
@@ -3035,6 +3050,7 @@
               <a:rPr lang="en-US" dirty="0"/>
               <a:t>Click to edit Master title style</a:t>
             </a:r>
+            <a:endParaRPr lang="en-US" dirty="0"/>
           </a:p>
         </p:txBody>
       </p:sp>
@@ -3176,7 +3192,7 @@
             <a:fld id="{B61BEF0D-F0BB-DE4B-95CE-6DB70DBA9567}" type="datetimeFigureOut">
               <a:rPr lang="en-US" dirty="0"/>
               <a:pPr/>
-              <a:t>4/2/26</a:t>
+              <a:t>1/1/2000</a:t>
             </a:fld>
             <a:endParaRPr lang="en-US" dirty="0"/>
           </a:p>
@@ -3204,7 +3220,8 @@
       <p:sp>
         <p:nvSpPr>
           <p:cNvPr id="9" name="Freeform 11"/>
-          <p:cNvSpPr/>
+          <p:cNvSpPr>
+          </p:cNvSpPr>
           <p:nvPr/>
         </p:nvSpPr>
         <p:spPr bwMode="auto">
@@ -3213,10 +3230,6 @@
             <a:ext cx="1588527" cy="507297"/>
           </a:xfrm>
           <a:custGeom>
-            <a:avLst/>
-            <a:gdLst/>
-            <a:ahLst/>
-            <a:cxnLst/>
             <a:rect l="l" t="t" r="r" b="b"/>
             <a:pathLst>
               <a:path w="9248" h="10000">
@@ -3304,7 +3317,7 @@
           <a:lstStyle/>
           <a:p>
             <a:fld id="{D57F1E4F-1CFF-5643-939E-217C01CDF565}" type="slidenum">
-              <a:rPr lang="en-US" dirty="0"/>
+              <a:rPr dirty="0" lang="en-US"/>
               <a:pPr/>
               <a:t>‹#›</a:t>
             </a:fld>
@@ -3356,6 +3369,7 @@
               <a:rPr lang="en-US" dirty="0"/>
               <a:t>Click to edit Master title style</a:t>
             </a:r>
+            <a:endParaRPr lang="en-US" dirty="0"/>
           </a:p>
         </p:txBody>
       </p:sp>
@@ -3414,6 +3428,7 @@
               <a:rPr lang="en-US" dirty="0"/>
               <a:t>Fifth level</a:t>
             </a:r>
+            <a:endParaRPr lang="en-US" dirty="0"/>
           </a:p>
         </p:txBody>
       </p:sp>
@@ -3472,6 +3487,7 @@
               <a:rPr lang="en-US" dirty="0"/>
               <a:t>Fifth level</a:t>
             </a:r>
+            <a:endParaRPr lang="en-US" dirty="0"/>
           </a:p>
         </p:txBody>
       </p:sp>
@@ -3493,7 +3509,7 @@
             <a:fld id="{B61BEF0D-F0BB-DE4B-95CE-6DB70DBA9567}" type="datetimeFigureOut">
               <a:rPr lang="en-US" dirty="0"/>
               <a:pPr/>
-              <a:t>4/2/26</a:t>
+              <a:t>1/1/2000</a:t>
             </a:fld>
             <a:endParaRPr lang="en-US" dirty="0"/>
           </a:p>
@@ -3521,7 +3537,8 @@
       <p:sp>
         <p:nvSpPr>
           <p:cNvPr id="10" name="Freeform 11"/>
-          <p:cNvSpPr/>
+          <p:cNvSpPr>
+          </p:cNvSpPr>
           <p:nvPr/>
         </p:nvSpPr>
         <p:spPr bwMode="auto">
@@ -3530,10 +3547,6 @@
             <a:ext cx="1588527" cy="507297"/>
           </a:xfrm>
           <a:custGeom>
-            <a:avLst/>
-            <a:gdLst/>
-            <a:ahLst/>
-            <a:cxnLst/>
             <a:rect l="l" t="t" r="r" b="b"/>
             <a:pathLst>
               <a:path w="9248" h="10000">
@@ -3621,7 +3634,7 @@
           <a:lstStyle/>
           <a:p>
             <a:fld id="{D57F1E4F-1CFF-5643-939E-217C01CDF565}" type="slidenum">
-              <a:rPr lang="en-US" dirty="0"/>
+              <a:rPr dirty="0" lang="en-US"/>
               <a:pPr/>
               <a:t>‹#›</a:t>
             </a:fld>
@@ -3673,6 +3686,7 @@
               <a:rPr lang="en-US" dirty="0"/>
               <a:t>Click to edit Master title style</a:t>
             </a:r>
+            <a:endParaRPr lang="en-US" dirty="0"/>
           </a:p>
         </p:txBody>
       </p:sp>
@@ -3798,6 +3812,7 @@
               <a:rPr lang="en-US" dirty="0"/>
               <a:t>Fifth level</a:t>
             </a:r>
+            <a:endParaRPr lang="en-US" dirty="0"/>
           </a:p>
         </p:txBody>
       </p:sp>
@@ -3923,6 +3938,7 @@
               <a:rPr lang="en-US" dirty="0"/>
               <a:t>Fifth level</a:t>
             </a:r>
+            <a:endParaRPr lang="en-US" dirty="0"/>
           </a:p>
         </p:txBody>
       </p:sp>
@@ -3944,7 +3960,7 @@
             <a:fld id="{B61BEF0D-F0BB-DE4B-95CE-6DB70DBA9567}" type="datetimeFigureOut">
               <a:rPr lang="en-US" dirty="0"/>
               <a:pPr/>
-              <a:t>4/2/26</a:t>
+              <a:t>1/1/2000</a:t>
             </a:fld>
             <a:endParaRPr lang="en-US" dirty="0"/>
           </a:p>
@@ -3972,7 +3988,8 @@
       <p:sp>
         <p:nvSpPr>
           <p:cNvPr id="12" name="Freeform 11"/>
-          <p:cNvSpPr/>
+          <p:cNvSpPr>
+          </p:cNvSpPr>
           <p:nvPr/>
         </p:nvSpPr>
         <p:spPr bwMode="auto">
@@ -3981,10 +3998,6 @@
             <a:ext cx="1588527" cy="507297"/>
           </a:xfrm>
           <a:custGeom>
-            <a:avLst/>
-            <a:gdLst/>
-            <a:ahLst/>
-            <a:cxnLst/>
             <a:rect l="l" t="t" r="r" b="b"/>
             <a:pathLst>
               <a:path w="9248" h="10000">
@@ -4072,7 +4085,7 @@
           <a:lstStyle/>
           <a:p>
             <a:fld id="{D57F1E4F-1CFF-5643-939E-217C01CDF565}" type="slidenum">
-              <a:rPr lang="en-US" dirty="0"/>
+              <a:rPr dirty="0" lang="en-US"/>
               <a:pPr/>
               <a:t>‹#›</a:t>
             </a:fld>
@@ -4124,6 +4137,7 @@
               <a:rPr lang="en-US" dirty="0"/>
               <a:t>Click to edit Master title style</a:t>
             </a:r>
+            <a:endParaRPr lang="en-US" dirty="0"/>
           </a:p>
         </p:txBody>
       </p:sp>
@@ -4145,7 +4159,7 @@
             <a:fld id="{B61BEF0D-F0BB-DE4B-95CE-6DB70DBA9567}" type="datetimeFigureOut">
               <a:rPr lang="en-US" dirty="0"/>
               <a:pPr/>
-              <a:t>4/2/26</a:t>
+              <a:t>1/1/2000</a:t>
             </a:fld>
             <a:endParaRPr lang="en-US" dirty="0"/>
           </a:p>
@@ -4173,7 +4187,8 @@
       <p:sp>
         <p:nvSpPr>
           <p:cNvPr id="7" name="Freeform 11"/>
-          <p:cNvSpPr/>
+          <p:cNvSpPr>
+          </p:cNvSpPr>
           <p:nvPr/>
         </p:nvSpPr>
         <p:spPr bwMode="auto">
@@ -4182,10 +4197,6 @@
             <a:ext cx="1588527" cy="507297"/>
           </a:xfrm>
           <a:custGeom>
-            <a:avLst/>
-            <a:gdLst/>
-            <a:ahLst/>
-            <a:cxnLst/>
             <a:rect l="l" t="t" r="r" b="b"/>
             <a:pathLst>
               <a:path w="9248" h="10000">
@@ -4268,7 +4279,7 @@
           <a:lstStyle/>
           <a:p>
             <a:fld id="{D57F1E4F-1CFF-5643-939E-217C01CDF565}" type="slidenum">
-              <a:rPr lang="en-US" dirty="0"/>
+              <a:rPr dirty="0" lang="en-US"/>
               <a:pPr/>
               <a:t>‹#›</a:t>
             </a:fld>
@@ -4319,7 +4330,7 @@
             <a:fld id="{B61BEF0D-F0BB-DE4B-95CE-6DB70DBA9567}" type="datetimeFigureOut">
               <a:rPr lang="en-US" dirty="0"/>
               <a:pPr/>
-              <a:t>4/2/26</a:t>
+              <a:t>1/1/2000</a:t>
             </a:fld>
             <a:endParaRPr lang="en-US" dirty="0"/>
           </a:p>
@@ -4347,7 +4358,8 @@
       <p:sp>
         <p:nvSpPr>
           <p:cNvPr id="6" name="Freeform 11"/>
-          <p:cNvSpPr/>
+          <p:cNvSpPr>
+          </p:cNvSpPr>
           <p:nvPr/>
         </p:nvSpPr>
         <p:spPr bwMode="auto">
@@ -4356,10 +4368,6 @@
             <a:ext cx="1588527" cy="507297"/>
           </a:xfrm>
           <a:custGeom>
-            <a:avLst/>
-            <a:gdLst/>
-            <a:ahLst/>
-            <a:cxnLst/>
             <a:rect l="l" t="t" r="r" b="b"/>
             <a:pathLst>
               <a:path w="9248" h="10000">
@@ -4442,7 +4450,7 @@
           <a:lstStyle/>
           <a:p>
             <a:fld id="{D57F1E4F-1CFF-5643-939E-217C01CDF565}" type="slidenum">
-              <a:rPr lang="en-US" dirty="0"/>
+              <a:rPr dirty="0" lang="en-US"/>
               <a:pPr/>
               <a:t>‹#›</a:t>
             </a:fld>
@@ -4503,6 +4511,7 @@
               <a:rPr lang="en-US" dirty="0"/>
               <a:t>Click to edit Master title style</a:t>
             </a:r>
+            <a:endParaRPr lang="en-US" dirty="0"/>
           </a:p>
         </p:txBody>
       </p:sp>
@@ -4561,6 +4570,7 @@
               <a:rPr lang="en-US" dirty="0"/>
               <a:t>Fifth level</a:t>
             </a:r>
+            <a:endParaRPr lang="en-US" dirty="0"/>
           </a:p>
         </p:txBody>
       </p:sp>
@@ -4647,7 +4657,7 @@
             <a:fld id="{B61BEF0D-F0BB-DE4B-95CE-6DB70DBA9567}" type="datetimeFigureOut">
               <a:rPr lang="en-US" dirty="0"/>
               <a:pPr/>
-              <a:t>4/2/26</a:t>
+              <a:t>1/1/2000</a:t>
             </a:fld>
             <a:endParaRPr lang="en-US" dirty="0"/>
           </a:p>
@@ -4675,7 +4685,8 @@
       <p:sp>
         <p:nvSpPr>
           <p:cNvPr id="9" name="Freeform 11"/>
-          <p:cNvSpPr/>
+          <p:cNvSpPr>
+          </p:cNvSpPr>
           <p:nvPr/>
         </p:nvSpPr>
         <p:spPr bwMode="auto">
@@ -4684,10 +4695,6 @@
             <a:ext cx="1588527" cy="507297"/>
           </a:xfrm>
           <a:custGeom>
-            <a:avLst/>
-            <a:gdLst/>
-            <a:ahLst/>
-            <a:cxnLst/>
             <a:rect l="l" t="t" r="r" b="b"/>
             <a:pathLst>
               <a:path w="9248" h="10000">
@@ -4770,7 +4777,7 @@
           <a:lstStyle/>
           <a:p>
             <a:fld id="{D57F1E4F-1CFF-5643-939E-217C01CDF565}" type="slidenum">
-              <a:rPr lang="en-US" dirty="0"/>
+              <a:rPr dirty="0" lang="en-US"/>
               <a:pPr/>
               <a:t>‹#›</a:t>
             </a:fld>
@@ -4833,6 +4840,7 @@
               <a:rPr lang="en-US" dirty="0"/>
               <a:t>Click to edit Master title style</a:t>
             </a:r>
+            <a:endParaRPr lang="en-US" dirty="0"/>
           </a:p>
         </p:txBody>
       </p:sp>
@@ -4984,7 +4992,7 @@
             <a:fld id="{B61BEF0D-F0BB-DE4B-95CE-6DB70DBA9567}" type="datetimeFigureOut">
               <a:rPr lang="en-US" dirty="0"/>
               <a:pPr/>
-              <a:t>4/2/26</a:t>
+              <a:t>1/1/2000</a:t>
             </a:fld>
             <a:endParaRPr lang="en-US" dirty="0"/>
           </a:p>
@@ -5012,7 +5020,8 @@
       <p:sp>
         <p:nvSpPr>
           <p:cNvPr id="9" name="Freeform 11"/>
-          <p:cNvSpPr/>
+          <p:cNvSpPr>
+          </p:cNvSpPr>
           <p:nvPr/>
         </p:nvSpPr>
         <p:spPr bwMode="auto">
@@ -5021,10 +5030,6 @@
             <a:ext cx="1588527" cy="507297"/>
           </a:xfrm>
           <a:custGeom>
-            <a:avLst/>
-            <a:gdLst/>
-            <a:ahLst/>
-            <a:cxnLst/>
             <a:rect l="l" t="t" r="r" b="b"/>
             <a:pathLst>
               <a:path w="9248" h="10000">
@@ -5112,7 +5117,7 @@
           <a:lstStyle/>
           <a:p>
             <a:fld id="{D57F1E4F-1CFF-5643-939E-217C01CDF565}" type="slidenum">
-              <a:rPr lang="en-US" dirty="0"/>
+              <a:rPr dirty="0" lang="en-US"/>
               <a:pPr/>
               <a:t>‹#›</a:t>
             </a:fld>
@@ -5167,7 +5172,8 @@
         <p:sp>
           <p:nvSpPr>
             <p:cNvPr id="24" name="Freeform 11"/>
-            <p:cNvSpPr/>
+            <p:cNvSpPr>
+            </p:cNvSpPr>
             <p:nvPr/>
           </p:nvSpPr>
           <p:spPr bwMode="auto">
@@ -5176,10 +5182,6 @@
               <a:ext cx="85725" cy="533400"/>
             </a:xfrm>
             <a:custGeom>
-              <a:avLst/>
-              <a:gdLst/>
-              <a:ahLst/>
-              <a:cxnLst/>
               <a:rect l="0" t="0" r="r" b="b"/>
               <a:pathLst>
                 <a:path w="22" h="136">
@@ -5224,18 +5226,12 @@
               <a:noFill/>
             </a:ln>
           </p:spPr>
-          <p:txBody>
-            <a:bodyPr/>
-            <a:lstStyle/>
-            <a:p>
-              <a:endParaRPr lang="en-US"/>
-            </a:p>
-          </p:txBody>
         </p:sp>
         <p:sp>
           <p:nvSpPr>
             <p:cNvPr id="25" name="Freeform 12"/>
-            <p:cNvSpPr/>
+            <p:cNvSpPr>
+            </p:cNvSpPr>
             <p:nvPr/>
           </p:nvSpPr>
           <p:spPr bwMode="auto">
@@ -5244,10 +5240,6 @@
               <a:ext cx="550863" cy="1978025"/>
             </a:xfrm>
             <a:custGeom>
-              <a:avLst/>
-              <a:gdLst/>
-              <a:ahLst/>
-              <a:cxnLst/>
               <a:rect l="0" t="0" r="r" b="b"/>
               <a:pathLst>
                 <a:path w="140" h="504">
@@ -5297,18 +5289,12 @@
               <a:noFill/>
             </a:ln>
           </p:spPr>
-          <p:txBody>
-            <a:bodyPr/>
-            <a:lstStyle/>
-            <a:p>
-              <a:endParaRPr lang="en-US"/>
-            </a:p>
-          </p:txBody>
         </p:sp>
         <p:sp>
           <p:nvSpPr>
             <p:cNvPr id="26" name="Freeform 13"/>
-            <p:cNvSpPr/>
+            <p:cNvSpPr>
+            </p:cNvSpPr>
             <p:nvPr/>
           </p:nvSpPr>
           <p:spPr bwMode="auto">
@@ -5317,10 +5303,6 @@
               <a:ext cx="519113" cy="1209675"/>
             </a:xfrm>
             <a:custGeom>
-              <a:avLst/>
-              <a:gdLst/>
-              <a:ahLst/>
-              <a:cxnLst/>
               <a:rect l="0" t="0" r="r" b="b"/>
               <a:pathLst>
                 <a:path w="132" h="308">
@@ -5375,18 +5357,12 @@
               <a:noFill/>
             </a:ln>
           </p:spPr>
-          <p:txBody>
-            <a:bodyPr/>
-            <a:lstStyle/>
-            <a:p>
-              <a:endParaRPr lang="en-US"/>
-            </a:p>
-          </p:txBody>
         </p:sp>
         <p:sp>
           <p:nvSpPr>
             <p:cNvPr id="27" name="Freeform 14"/>
-            <p:cNvSpPr/>
+            <p:cNvSpPr>
+            </p:cNvSpPr>
             <p:nvPr/>
           </p:nvSpPr>
           <p:spPr bwMode="auto">
@@ -5395,10 +5371,6 @@
               <a:ext cx="146050" cy="309563"/>
             </a:xfrm>
             <a:custGeom>
-              <a:avLst/>
-              <a:gdLst/>
-              <a:ahLst/>
-              <a:cxnLst/>
               <a:rect l="0" t="0" r="r" b="b"/>
               <a:pathLst>
                 <a:path w="37" h="79">
@@ -5433,18 +5405,12 @@
               <a:noFill/>
             </a:ln>
           </p:spPr>
-          <p:txBody>
-            <a:bodyPr/>
-            <a:lstStyle/>
-            <a:p>
-              <a:endParaRPr lang="en-US"/>
-            </a:p>
-          </p:txBody>
         </p:sp>
         <p:sp>
           <p:nvSpPr>
             <p:cNvPr id="28" name="Freeform 15"/>
-            <p:cNvSpPr/>
+            <p:cNvSpPr>
+            </p:cNvSpPr>
             <p:nvPr/>
           </p:nvSpPr>
           <p:spPr bwMode="auto">
@@ -5453,10 +5419,6 @@
               <a:ext cx="700088" cy="2835275"/>
             </a:xfrm>
             <a:custGeom>
-              <a:avLst/>
-              <a:gdLst/>
-              <a:ahLst/>
-              <a:cxnLst/>
               <a:rect l="0" t="0" r="r" b="b"/>
               <a:pathLst>
                 <a:path w="178" h="722">
@@ -5526,18 +5488,12 @@
               <a:noFill/>
             </a:ln>
           </p:spPr>
-          <p:txBody>
-            <a:bodyPr/>
-            <a:lstStyle/>
-            <a:p>
-              <a:endParaRPr lang="en-US"/>
-            </a:p>
-          </p:txBody>
         </p:sp>
         <p:sp>
           <p:nvSpPr>
             <p:cNvPr id="29" name="Freeform 16"/>
-            <p:cNvSpPr/>
+            <p:cNvSpPr>
+            </p:cNvSpPr>
             <p:nvPr/>
           </p:nvSpPr>
           <p:spPr bwMode="auto">
@@ -5546,10 +5502,6 @@
               <a:ext cx="90488" cy="2493963"/>
             </a:xfrm>
             <a:custGeom>
-              <a:avLst/>
-              <a:gdLst/>
-              <a:ahLst/>
-              <a:cxnLst/>
               <a:rect l="0" t="0" r="r" b="b"/>
               <a:pathLst>
                 <a:path w="23" h="635">
@@ -5614,18 +5566,12 @@
               <a:noFill/>
             </a:ln>
           </p:spPr>
-          <p:txBody>
-            <a:bodyPr/>
-            <a:lstStyle/>
-            <a:p>
-              <a:endParaRPr lang="en-US"/>
-            </a:p>
-          </p:txBody>
         </p:sp>
         <p:sp>
           <p:nvSpPr>
             <p:cNvPr id="30" name="Freeform 17"/>
-            <p:cNvSpPr/>
+            <p:cNvSpPr>
+            </p:cNvSpPr>
             <p:nvPr/>
           </p:nvSpPr>
           <p:spPr bwMode="auto">
@@ -5634,10 +5580,6 @@
               <a:ext cx="66675" cy="420688"/>
             </a:xfrm>
             <a:custGeom>
-              <a:avLst/>
-              <a:gdLst/>
-              <a:ahLst/>
-              <a:cxnLst/>
               <a:rect l="0" t="0" r="r" b="b"/>
               <a:pathLst>
                 <a:path w="17" h="107">
@@ -5682,18 +5624,12 @@
               <a:noFill/>
             </a:ln>
           </p:spPr>
-          <p:txBody>
-            <a:bodyPr/>
-            <a:lstStyle/>
-            <a:p>
-              <a:endParaRPr lang="en-US"/>
-            </a:p>
-          </p:txBody>
         </p:sp>
         <p:sp>
           <p:nvSpPr>
             <p:cNvPr id="31" name="Freeform 18"/>
-            <p:cNvSpPr/>
+            <p:cNvSpPr>
+            </p:cNvSpPr>
             <p:nvPr/>
           </p:nvSpPr>
           <p:spPr bwMode="auto">
@@ -5702,10 +5638,6 @@
               <a:ext cx="161925" cy="873125"/>
             </a:xfrm>
             <a:custGeom>
-              <a:avLst/>
-              <a:gdLst/>
-              <a:ahLst/>
-              <a:cxnLst/>
               <a:rect l="0" t="0" r="r" b="b"/>
               <a:pathLst>
                 <a:path w="41" h="222">
@@ -5770,18 +5702,12 @@
               <a:noFill/>
             </a:ln>
           </p:spPr>
-          <p:txBody>
-            <a:bodyPr/>
-            <a:lstStyle/>
-            <a:p>
-              <a:endParaRPr lang="en-US"/>
-            </a:p>
-          </p:txBody>
         </p:sp>
         <p:sp>
           <p:nvSpPr>
             <p:cNvPr id="32" name="Freeform 19"/>
-            <p:cNvSpPr/>
+            <p:cNvSpPr>
+            </p:cNvSpPr>
             <p:nvPr/>
           </p:nvSpPr>
           <p:spPr bwMode="auto">
@@ -5790,10 +5716,6 @@
               <a:ext cx="1768475" cy="3448050"/>
             </a:xfrm>
             <a:custGeom>
-              <a:avLst/>
-              <a:gdLst/>
-              <a:ahLst/>
-              <a:cxnLst/>
               <a:rect l="0" t="0" r="r" b="b"/>
               <a:pathLst>
                 <a:path w="450" h="878">
@@ -5893,18 +5815,12 @@
               <a:noFill/>
             </a:ln>
           </p:spPr>
-          <p:txBody>
-            <a:bodyPr/>
-            <a:lstStyle/>
-            <a:p>
-              <a:endParaRPr lang="en-US"/>
-            </a:p>
-          </p:txBody>
         </p:sp>
         <p:sp>
           <p:nvSpPr>
             <p:cNvPr id="33" name="Freeform 20"/>
-            <p:cNvSpPr/>
+            <p:cNvSpPr>
+            </p:cNvSpPr>
             <p:nvPr/>
           </p:nvSpPr>
           <p:spPr bwMode="auto">
@@ -5913,10 +5829,6 @@
               <a:ext cx="138113" cy="287338"/>
             </a:xfrm>
             <a:custGeom>
-              <a:avLst/>
-              <a:gdLst/>
-              <a:ahLst/>
-              <a:cxnLst/>
               <a:rect l="0" t="0" r="r" b="b"/>
               <a:pathLst>
                 <a:path w="35" h="73">
@@ -5951,18 +5863,12 @@
               <a:noFill/>
             </a:ln>
           </p:spPr>
-          <p:txBody>
-            <a:bodyPr/>
-            <a:lstStyle/>
-            <a:p>
-              <a:endParaRPr lang="en-US"/>
-            </a:p>
-          </p:txBody>
         </p:sp>
         <p:sp>
           <p:nvSpPr>
             <p:cNvPr id="34" name="Freeform 21"/>
-            <p:cNvSpPr/>
+            <p:cNvSpPr>
+            </p:cNvSpPr>
             <p:nvPr/>
           </p:nvSpPr>
           <p:spPr bwMode="auto">
@@ -5971,10 +5877,6 @@
               <a:ext cx="31750" cy="188913"/>
             </a:xfrm>
             <a:custGeom>
-              <a:avLst/>
-              <a:gdLst/>
-              <a:ahLst/>
-              <a:cxnLst/>
               <a:rect l="0" t="0" r="r" b="b"/>
               <a:pathLst>
                 <a:path w="8" h="48">
@@ -6019,18 +5921,12 @@
               <a:noFill/>
             </a:ln>
           </p:spPr>
-          <p:txBody>
-            <a:bodyPr/>
-            <a:lstStyle/>
-            <a:p>
-              <a:endParaRPr lang="en-US"/>
-            </a:p>
-          </p:txBody>
         </p:sp>
         <p:sp>
           <p:nvSpPr>
             <p:cNvPr id="35" name="Freeform 22"/>
-            <p:cNvSpPr/>
+            <p:cNvSpPr>
+            </p:cNvSpPr>
             <p:nvPr/>
           </p:nvSpPr>
           <p:spPr bwMode="auto">
@@ -6039,10 +5935,6 @@
               <a:ext cx="203200" cy="530225"/>
             </a:xfrm>
             <a:custGeom>
-              <a:avLst/>
-              <a:gdLst/>
-              <a:ahLst/>
-              <a:cxnLst/>
               <a:rect l="0" t="0" r="r" b="b"/>
               <a:pathLst>
                 <a:path w="52" h="135">
@@ -6097,13 +5989,6 @@
               <a:noFill/>
             </a:ln>
           </p:spPr>
-          <p:txBody>
-            <a:bodyPr/>
-            <a:lstStyle/>
-            <a:p>
-              <a:endParaRPr lang="en-US"/>
-            </a:p>
-          </p:txBody>
         </p:sp>
       </p:grpSp>
       <p:grpSp>
@@ -6123,7 +6008,8 @@
         <p:sp>
           <p:nvSpPr>
             <p:cNvPr id="11" name="Freeform 27"/>
-            <p:cNvSpPr/>
+            <p:cNvSpPr>
+            </p:cNvSpPr>
             <p:nvPr/>
           </p:nvSpPr>
           <p:spPr bwMode="auto">
@@ -6132,10 +6018,6 @@
               <a:ext cx="409575" cy="3646488"/>
             </a:xfrm>
             <a:custGeom>
-              <a:avLst/>
-              <a:gdLst/>
-              <a:ahLst/>
-              <a:cxnLst/>
               <a:rect l="0" t="0" r="r" b="b"/>
               <a:pathLst>
                 <a:path w="103" h="920">
@@ -6223,18 +6105,12 @@
               <a:noFill/>
             </a:ln>
           </p:spPr>
-          <p:txBody>
-            <a:bodyPr/>
-            <a:lstStyle/>
-            <a:p>
-              <a:endParaRPr lang="en-US"/>
-            </a:p>
-          </p:txBody>
         </p:sp>
         <p:sp>
           <p:nvSpPr>
             <p:cNvPr id="12" name="Freeform 28"/>
-            <p:cNvSpPr/>
+            <p:cNvSpPr>
+            </p:cNvSpPr>
             <p:nvPr/>
           </p:nvSpPr>
           <p:spPr bwMode="auto">
@@ -6243,10 +6119,6 @@
               <a:ext cx="350838" cy="1309688"/>
             </a:xfrm>
             <a:custGeom>
-              <a:avLst/>
-              <a:gdLst/>
-              <a:ahLst/>
-              <a:cxnLst/>
               <a:rect l="0" t="0" r="r" b="b"/>
               <a:pathLst>
                 <a:path w="88" h="330">
@@ -6299,18 +6171,12 @@
               <a:noFill/>
             </a:ln>
           </p:spPr>
-          <p:txBody>
-            <a:bodyPr/>
-            <a:lstStyle/>
-            <a:p>
-              <a:endParaRPr lang="en-US"/>
-            </a:p>
-          </p:txBody>
         </p:sp>
         <p:sp>
           <p:nvSpPr>
             <p:cNvPr id="13" name="Freeform 29"/>
-            <p:cNvSpPr/>
+            <p:cNvSpPr>
+            </p:cNvSpPr>
             <p:nvPr/>
           </p:nvSpPr>
           <p:spPr bwMode="auto">
@@ -6319,10 +6185,6 @@
               <a:ext cx="357188" cy="820738"/>
             </a:xfrm>
             <a:custGeom>
-              <a:avLst/>
-              <a:gdLst/>
-              <a:ahLst/>
-              <a:cxnLst/>
               <a:rect l="0" t="0" r="r" b="b"/>
               <a:pathLst>
                 <a:path w="90" h="207">
@@ -6375,18 +6237,12 @@
               <a:noFill/>
             </a:ln>
           </p:spPr>
-          <p:txBody>
-            <a:bodyPr/>
-            <a:lstStyle/>
-            <a:p>
-              <a:endParaRPr lang="en-US"/>
-            </a:p>
-          </p:txBody>
         </p:sp>
         <p:sp>
           <p:nvSpPr>
             <p:cNvPr id="14" name="Freeform 30"/>
-            <p:cNvSpPr/>
+            <p:cNvSpPr>
+            </p:cNvSpPr>
             <p:nvPr/>
           </p:nvSpPr>
           <p:spPr bwMode="auto">
@@ -6395,10 +6251,6 @@
               <a:ext cx="457200" cy="1852613"/>
             </a:xfrm>
             <a:custGeom>
-              <a:avLst/>
-              <a:gdLst/>
-              <a:ahLst/>
-              <a:cxnLst/>
               <a:rect l="0" t="0" r="r" b="b"/>
               <a:pathLst>
                 <a:path w="115" h="467">
@@ -6466,18 +6318,12 @@
               <a:noFill/>
             </a:ln>
           </p:spPr>
-          <p:txBody>
-            <a:bodyPr/>
-            <a:lstStyle/>
-            <a:p>
-              <a:endParaRPr lang="en-US"/>
-            </a:p>
-          </p:txBody>
         </p:sp>
         <p:sp>
           <p:nvSpPr>
             <p:cNvPr id="15" name="Freeform 31"/>
-            <p:cNvSpPr/>
+            <p:cNvSpPr>
+            </p:cNvSpPr>
             <p:nvPr/>
           </p:nvSpPr>
           <p:spPr bwMode="auto">
@@ -6486,10 +6332,6 @@
               <a:ext cx="144463" cy="2508250"/>
             </a:xfrm>
             <a:custGeom>
-              <a:avLst/>
-              <a:gdLst/>
-              <a:ahLst/>
-              <a:cxnLst/>
               <a:rect l="0" t="0" r="r" b="b"/>
               <a:pathLst>
                 <a:path w="36" h="633">
@@ -6567,18 +6409,12 @@
               <a:noFill/>
             </a:ln>
           </p:spPr>
-          <p:txBody>
-            <a:bodyPr/>
-            <a:lstStyle/>
-            <a:p>
-              <a:endParaRPr lang="en-US"/>
-            </a:p>
-          </p:txBody>
         </p:sp>
         <p:sp>
           <p:nvSpPr>
             <p:cNvPr id="16" name="Freeform 32"/>
-            <p:cNvSpPr/>
+            <p:cNvSpPr>
+            </p:cNvSpPr>
             <p:nvPr/>
           </p:nvSpPr>
           <p:spPr bwMode="auto">
@@ -6587,10 +6423,6 @@
               <a:ext cx="111125" cy="233363"/>
             </a:xfrm>
             <a:custGeom>
-              <a:avLst/>
-              <a:gdLst/>
-              <a:ahLst/>
-              <a:cxnLst/>
               <a:rect l="0" t="0" r="r" b="b"/>
               <a:pathLst>
                 <a:path w="28" h="59">
@@ -6623,18 +6455,12 @@
               <a:noFill/>
             </a:ln>
           </p:spPr>
-          <p:txBody>
-            <a:bodyPr/>
-            <a:lstStyle/>
-            <a:p>
-              <a:endParaRPr lang="en-US"/>
-            </a:p>
-          </p:txBody>
         </p:sp>
         <p:sp>
           <p:nvSpPr>
             <p:cNvPr id="17" name="Freeform 33"/>
-            <p:cNvSpPr/>
+            <p:cNvSpPr>
+            </p:cNvSpPr>
             <p:nvPr/>
           </p:nvSpPr>
           <p:spPr bwMode="auto">
@@ -6643,10 +6469,6 @@
               <a:ext cx="68263" cy="423863"/>
             </a:xfrm>
             <a:custGeom>
-              <a:avLst/>
-              <a:gdLst/>
-              <a:ahLst/>
-              <a:cxnLst/>
               <a:rect l="0" t="0" r="r" b="b"/>
               <a:pathLst>
                 <a:path w="17" h="107">
@@ -6694,18 +6516,12 @@
               <a:noFill/>
             </a:ln>
           </p:spPr>
-          <p:txBody>
-            <a:bodyPr/>
-            <a:lstStyle/>
-            <a:p>
-              <a:endParaRPr lang="en-US"/>
-            </a:p>
-          </p:txBody>
         </p:sp>
         <p:sp>
           <p:nvSpPr>
             <p:cNvPr id="18" name="Freeform 34"/>
-            <p:cNvSpPr/>
+            <p:cNvSpPr>
+            </p:cNvSpPr>
             <p:nvPr/>
           </p:nvSpPr>
           <p:spPr bwMode="auto">
@@ -6714,10 +6530,6 @@
               <a:ext cx="1168400" cy="2251075"/>
             </a:xfrm>
             <a:custGeom>
-              <a:avLst/>
-              <a:gdLst/>
-              <a:ahLst/>
-              <a:cxnLst/>
               <a:rect l="0" t="0" r="r" b="b"/>
               <a:pathLst>
                 <a:path w="294" h="568">
@@ -6810,18 +6622,12 @@
               <a:noFill/>
             </a:ln>
           </p:spPr>
-          <p:txBody>
-            <a:bodyPr/>
-            <a:lstStyle/>
-            <a:p>
-              <a:endParaRPr lang="en-US"/>
-            </a:p>
-          </p:txBody>
         </p:sp>
         <p:sp>
           <p:nvSpPr>
             <p:cNvPr id="19" name="Freeform 35"/>
-            <p:cNvSpPr/>
+            <p:cNvSpPr>
+            </p:cNvSpPr>
             <p:nvPr/>
           </p:nvSpPr>
           <p:spPr bwMode="auto">
@@ -6830,10 +6636,6 @@
               <a:ext cx="100013" cy="209550"/>
             </a:xfrm>
             <a:custGeom>
-              <a:avLst/>
-              <a:gdLst/>
-              <a:ahLst/>
-              <a:cxnLst/>
               <a:rect l="0" t="0" r="r" b="b"/>
               <a:pathLst>
                 <a:path w="25" h="53">
@@ -6866,18 +6668,12 @@
               <a:noFill/>
             </a:ln>
           </p:spPr>
-          <p:txBody>
-            <a:bodyPr/>
-            <a:lstStyle/>
-            <a:p>
-              <a:endParaRPr lang="en-US"/>
-            </a:p>
-          </p:txBody>
         </p:sp>
         <p:sp>
           <p:nvSpPr>
             <p:cNvPr id="20" name="Freeform 36"/>
-            <p:cNvSpPr/>
+            <p:cNvSpPr>
+            </p:cNvSpPr>
             <p:nvPr/>
           </p:nvSpPr>
           <p:spPr bwMode="auto">
@@ -6886,10 +6682,6 @@
               <a:ext cx="114300" cy="558800"/>
             </a:xfrm>
             <a:custGeom>
-              <a:avLst/>
-              <a:gdLst/>
-              <a:ahLst/>
-              <a:cxnLst/>
               <a:rect l="0" t="0" r="r" b="b"/>
               <a:pathLst>
                 <a:path w="29" h="141">
@@ -6942,18 +6734,12 @@
               <a:noFill/>
             </a:ln>
           </p:spPr>
-          <p:txBody>
-            <a:bodyPr/>
-            <a:lstStyle/>
-            <a:p>
-              <a:endParaRPr lang="en-US"/>
-            </a:p>
-          </p:txBody>
         </p:sp>
         <p:sp>
           <p:nvSpPr>
             <p:cNvPr id="21" name="Freeform 37"/>
-            <p:cNvSpPr/>
+            <p:cNvSpPr>
+            </p:cNvSpPr>
             <p:nvPr/>
           </p:nvSpPr>
           <p:spPr bwMode="auto">
@@ -6962,10 +6748,6 @@
               <a:ext cx="31750" cy="188913"/>
             </a:xfrm>
             <a:custGeom>
-              <a:avLst/>
-              <a:gdLst/>
-              <a:ahLst/>
-              <a:cxnLst/>
               <a:rect l="0" t="0" r="r" b="b"/>
               <a:pathLst>
                 <a:path w="8" h="48">
@@ -7013,18 +6795,12 @@
               <a:noFill/>
             </a:ln>
           </p:spPr>
-          <p:txBody>
-            <a:bodyPr/>
-            <a:lstStyle/>
-            <a:p>
-              <a:endParaRPr lang="en-US"/>
-            </a:p>
-          </p:txBody>
         </p:sp>
         <p:sp>
           <p:nvSpPr>
             <p:cNvPr id="22" name="Freeform 38"/>
-            <p:cNvSpPr/>
+            <p:cNvSpPr>
+            </p:cNvSpPr>
             <p:nvPr/>
           </p:nvSpPr>
           <p:spPr bwMode="auto">
@@ -7033,10 +6809,6 @@
               <a:ext cx="174625" cy="439738"/>
             </a:xfrm>
             <a:custGeom>
-              <a:avLst/>
-              <a:gdLst/>
-              <a:ahLst/>
-              <a:cxnLst/>
               <a:rect l="0" t="0" r="r" b="b"/>
               <a:pathLst>
                 <a:path w="44" h="111">
@@ -7089,13 +6861,6 @@
               <a:noFill/>
             </a:ln>
           </p:spPr>
-          <p:txBody>
-            <a:bodyPr/>
-            <a:lstStyle/>
-            <a:p>
-              <a:endParaRPr lang="en-US"/>
-            </a:p>
-          </p:txBody>
         </p:sp>
       </p:grpSp>
       <p:sp>
@@ -7110,7 +6875,6 @@
             <a:ext cx="182880" cy="6858000"/>
           </a:xfrm>
           <a:prstGeom prst="rect">
-            <a:avLst/>
           </a:prstGeom>
           <a:solidFill>
             <a:schemeClr val="tx2"/>
@@ -7134,13 +6898,6 @@
             <a:schemeClr val="lt1"/>
           </a:fontRef>
         </p:style>
-        <p:txBody>
-          <a:bodyPr/>
-          <a:lstStyle/>
-          <a:p>
-            <a:endParaRPr lang="en-US"/>
-          </a:p>
-        </p:txBody>
       </p:sp>
       <p:sp>
         <p:nvSpPr>
@@ -7158,7 +6915,6 @@
             <a:ext cx="8911687" cy="1280890"/>
           </a:xfrm>
           <a:prstGeom prst="rect">
-            <a:avLst/>
           </a:prstGeom>
         </p:spPr>
         <p:txBody>
@@ -7171,6 +6927,7 @@
               <a:rPr lang="en-US" dirty="0"/>
               <a:t>Click to edit Master title style</a:t>
             </a:r>
+            <a:endParaRPr lang="en-US" dirty="0"/>
           </a:p>
         </p:txBody>
       </p:sp>
@@ -7190,7 +6947,6 @@
             <a:ext cx="8915400" cy="3886200"/>
           </a:xfrm>
           <a:prstGeom prst="rect">
-            <a:avLst/>
           </a:prstGeom>
         </p:spPr>
         <p:txBody>
@@ -7232,6 +6988,7 @@
               <a:rPr lang="en-US" dirty="0"/>
               <a:t>Fifth level</a:t>
             </a:r>
+            <a:endParaRPr lang="en-US" dirty="0"/>
           </a:p>
         </p:txBody>
       </p:sp>
@@ -7251,7 +7008,6 @@
             <a:ext cx="1146283" cy="370396"/>
           </a:xfrm>
           <a:prstGeom prst="rect">
-            <a:avLst/>
           </a:prstGeom>
         </p:spPr>
         <p:txBody>
@@ -7271,7 +7027,7 @@
             <a:fld id="{B61BEF0D-F0BB-DE4B-95CE-6DB70DBA9567}" type="datetimeFigureOut">
               <a:rPr lang="en-US" dirty="0"/>
               <a:pPr/>
-              <a:t>4/2/26</a:t>
+              <a:t>1/1/2000</a:t>
             </a:fld>
             <a:endParaRPr lang="en-US" dirty="0"/>
           </a:p>
@@ -7293,7 +7049,6 @@
             <a:ext cx="7619999" cy="365125"/>
           </a:xfrm>
           <a:prstGeom prst="rect">
-            <a:avLst/>
           </a:prstGeom>
         </p:spPr>
         <p:txBody>
@@ -7330,7 +7085,6 @@
             <a:ext cx="779767" cy="365125"/>
           </a:xfrm>
           <a:prstGeom prst="rect">
-            <a:avLst/>
           </a:prstGeom>
         </p:spPr>
         <p:txBody>
@@ -7769,7 +7523,7 @@
 </file>
 
 <file path=ppt/slides/slide1.xml><?xml version="1.0" encoding="utf-8"?>
-<p:sld xmlns:a="http://schemas.openxmlformats.org/drawingml/2006/main" xmlns:r="http://schemas.openxmlformats.org/officeDocument/2006/relationships" xmlns:p="http://schemas.openxmlformats.org/presentationml/2006/main">
+<p:sld xmlns:a="http://schemas.openxmlformats.org/drawingml/2006/main" xmlns:p="http://schemas.openxmlformats.org/presentationml/2006/main" xmlns:r="http://schemas.openxmlformats.org/officeDocument/2006/relationships">
   <p:cSld>
     <p:spTree>
       <p:nvGrpSpPr>
@@ -7777,14 +7531,7 @@
         <p:cNvGrpSpPr/>
         <p:nvPr/>
       </p:nvGrpSpPr>
-      <p:grpSpPr>
-        <a:xfrm>
-          <a:off x="0" y="0"/>
-          <a:ext cx="0" cy="0"/>
-          <a:chOff x="0" y="0"/>
-          <a:chExt cx="0" cy="0"/>
-        </a:xfrm>
-      </p:grpSpPr>
+      <p:grpSpPr/>
       <p:sp>
         <p:nvSpPr>
           <p:cNvPr id="2" name="Title 1"/>
@@ -7802,28 +7549,7 @@
           <a:p>
             <a:pPr algn="l"/>
             <a:r>
-              <a:rPr lang="en-US" dirty="0"/>
-              <a:t>IBM </a:t>
-            </a:r>
-            <a:r>
-              <a:rPr lang="en-US" dirty="0" err="1"/>
-              <a:t>i</a:t>
-            </a:r>
-            <a:r>
-              <a:rPr lang="en-US" dirty="0"/>
-              <a:t> </a:t>
-            </a:r>
-            <a:r>
-              <a:rPr dirty="0"/>
-              <a:t>CL Tools </a:t>
-            </a:r>
-            <a:r>
-              <a:rPr lang="en-US" dirty="0"/>
-              <a:t>Support in</a:t>
-            </a:r>
-            <a:r>
-              <a:rPr dirty="0"/>
-              <a:t> VS Code</a:t>
+              <a:t>IBM CLLE: CL Language Tools for VS Code</a:t>
             </a:r>
           </a:p>
         </p:txBody>
@@ -7845,9 +7571,7 @@
           </a:xfrm>
         </p:spPr>
         <p:txBody>
-          <a:bodyPr wrap="square" lIns="109728" tIns="91440" rIns="109728" bIns="91440">
-            <a:normAutofit/>
-          </a:bodyPr>
+          <a:bodyPr wrap="square" lIns="109728" rIns="109728" tIns="91440" bIns="91440"/>
           <a:lstStyle/>
           <a:p>
             <a:pPr>
@@ -7859,31 +7583,13 @@
               </a:spcAft>
             </a:pPr>
             <a:r>
-              <a:rPr sz="2400" b="0" i="0" dirty="0">
+              <a:rPr sz="1500" b="0" i="0">
                 <a:solidFill>
                   <a:srgbClr val="1A1A2E"/>
                 </a:solidFill>
                 <a:latin typeface="Calibri"/>
               </a:rPr>
-              <a:t>From IBM — A full-featured language extension for IBM </a:t>
-            </a:r>
-            <a:r>
-              <a:rPr sz="2400" b="0" i="0" dirty="0" err="1">
-                <a:solidFill>
-                  <a:srgbClr val="1A1A2E"/>
-                </a:solidFill>
-                <a:latin typeface="Calibri"/>
-              </a:rPr>
-              <a:t>i</a:t>
-            </a:r>
-            <a:r>
-              <a:rPr sz="2400" b="0" i="0" dirty="0">
-                <a:solidFill>
-                  <a:srgbClr val="1A1A2E"/>
-                </a:solidFill>
-                <a:latin typeface="Calibri"/>
-              </a:rPr>
-              <a:t> Control Language</a:t>
+              <a:t>From IBM — A full-featured language extension for IBM i Control Language</a:t>
             </a:r>
           </a:p>
           <a:p>
@@ -7896,7 +7602,7 @@
               </a:spcAft>
             </a:pPr>
             <a:r>
-              <a:rPr sz="2400" b="0" i="0" dirty="0">
+              <a:rPr sz="1500" b="0" i="0">
                 <a:solidFill>
                   <a:srgbClr val="1A1A2E"/>
                 </a:solidFill>
@@ -7905,25 +7611,16 @@
               <a:t>Works with </a:t>
             </a:r>
             <a:r>
-              <a:rPr sz="2400" b="1" i="0" dirty="0">
+              <a:rPr sz="1500" b="1" i="0">
                 <a:solidFill>
                   <a:srgbClr val="1F497D"/>
                 </a:solidFill>
                 <a:latin typeface="Calibri"/>
               </a:rPr>
-              <a:t>Code for IBM </a:t>
-            </a:r>
-            <a:r>
-              <a:rPr sz="2400" b="1" i="0" dirty="0" err="1">
-                <a:solidFill>
-                  <a:srgbClr val="1F497D"/>
-                </a:solidFill>
-                <a:latin typeface="Calibri"/>
-              </a:rPr>
-              <a:t>i</a:t>
-            </a:r>
-            <a:r>
-              <a:rPr sz="2400" b="0" i="0" dirty="0">
+              <a:t>Code for IBM i</a:t>
+            </a:r>
+            <a:r>
+              <a:rPr sz="1500" b="0" i="0">
                 <a:solidFill>
                   <a:srgbClr val="1A1A2E"/>
                 </a:solidFill>
@@ -7942,7 +7639,7 @@
               </a:spcAft>
             </a:pPr>
             <a:r>
-              <a:rPr sz="2400" b="0" i="0" dirty="0">
+              <a:rPr sz="1500" b="0" i="0">
                 <a:solidFill>
                   <a:srgbClr val="1A1A2E"/>
                 </a:solidFill>
@@ -7951,7 +7648,7 @@
               <a:t>Supports </a:t>
             </a:r>
             <a:r>
-              <a:rPr sz="2400" b="0" i="0" dirty="0">
+              <a:rPr sz="1300" b="0" i="0">
                 <a:solidFill>
                   <a:srgbClr val="B5204F"/>
                 </a:solidFill>
@@ -7960,7 +7657,7 @@
               <a:t>.cl</a:t>
             </a:r>
             <a:r>
-              <a:rPr sz="2400" b="0" i="0" dirty="0">
+              <a:rPr sz="1500" b="0" i="0">
                 <a:solidFill>
                   <a:srgbClr val="1A1A2E"/>
                 </a:solidFill>
@@ -7969,52 +7666,34 @@
               <a:t>, </a:t>
             </a:r>
             <a:r>
-              <a:rPr sz="2400" b="0" i="0" dirty="0">
+              <a:rPr sz="1300" b="0" i="0">
                 <a:solidFill>
                   <a:srgbClr val="B5204F"/>
                 </a:solidFill>
                 <a:latin typeface="Courier New"/>
               </a:rPr>
-              <a:t>.</a:t>
-            </a:r>
-            <a:r>
-              <a:rPr sz="2400" b="0" i="0" dirty="0" err="1">
+              <a:t>.bnd</a:t>
+            </a:r>
+            <a:r>
+              <a:rPr sz="1500" b="0" i="0">
+                <a:solidFill>
+                  <a:srgbClr val="1A1A2E"/>
+                </a:solidFill>
+                <a:latin typeface="Calibri"/>
+              </a:rPr>
+              <a:t>, and </a:t>
+            </a:r>
+            <a:r>
+              <a:rPr sz="1300" b="0" i="0">
                 <a:solidFill>
                   <a:srgbClr val="B5204F"/>
                 </a:solidFill>
                 <a:latin typeface="Courier New"/>
               </a:rPr>
-              <a:t>bnd</a:t>
-            </a:r>
-            <a:r>
-              <a:rPr sz="2400" b="0" i="0" dirty="0">
-                <a:solidFill>
-                  <a:srgbClr val="1A1A2E"/>
-                </a:solidFill>
-                <a:latin typeface="Calibri"/>
-              </a:rPr>
-              <a:t>, and </a:t>
-            </a:r>
-            <a:r>
-              <a:rPr sz="2400" b="0" i="0" dirty="0">
-                <a:solidFill>
-                  <a:srgbClr val="B5204F"/>
-                </a:solidFill>
-                <a:latin typeface="Courier New"/>
-              </a:rPr>
-              <a:t>.</a:t>
-            </a:r>
-            <a:r>
-              <a:rPr sz="2400" b="0" i="0" dirty="0" err="1">
-                <a:solidFill>
-                  <a:srgbClr val="B5204F"/>
-                </a:solidFill>
-                <a:latin typeface="Courier New"/>
-              </a:rPr>
-              <a:t>cmd</a:t>
-            </a:r>
-            <a:r>
-              <a:rPr sz="2400" b="0" i="0" dirty="0">
+              <a:t>.cmd</a:t>
+            </a:r>
+            <a:r>
+              <a:rPr sz="1500" b="0" i="0">
                 <a:solidFill>
                   <a:srgbClr val="1A1A2E"/>
                 </a:solidFill>
@@ -8033,7 +7712,7 @@
               </a:spcAft>
             </a:pPr>
             <a:r>
-              <a:rPr sz="2400" b="0" i="0" dirty="0">
+              <a:rPr sz="1500" b="0" i="0">
                 <a:solidFill>
                   <a:srgbClr val="1A1A2E"/>
                 </a:solidFill>
@@ -8052,7 +7731,7 @@
               </a:spcAft>
             </a:pPr>
             <a:r>
-              <a:rPr sz="2400" b="0" i="0" dirty="0">
+              <a:rPr sz="1500" b="0" i="0">
                 <a:solidFill>
                   <a:srgbClr val="1A1A2E"/>
                 </a:solidFill>
@@ -8072,7 +7751,7 @@
 </file>
 
 <file path=ppt/slides/slide10.xml><?xml version="1.0" encoding="utf-8"?>
-<p:sld xmlns:a="http://schemas.openxmlformats.org/drawingml/2006/main" xmlns:r="http://schemas.openxmlformats.org/officeDocument/2006/relationships" xmlns:p="http://schemas.openxmlformats.org/presentationml/2006/main">
+<p:sld xmlns:a="http://schemas.openxmlformats.org/drawingml/2006/main" xmlns:p="http://schemas.openxmlformats.org/presentationml/2006/main" xmlns:r="http://schemas.openxmlformats.org/officeDocument/2006/relationships">
   <p:cSld>
     <p:spTree>
       <p:nvGrpSpPr>
@@ -8080,14 +7759,7 @@
         <p:cNvGrpSpPr/>
         <p:nvPr/>
       </p:nvGrpSpPr>
-      <p:grpSpPr>
-        <a:xfrm>
-          <a:off x="0" y="0"/>
-          <a:ext cx="0" cy="0"/>
-          <a:chOff x="0" y="0"/>
-          <a:chExt cx="0" cy="0"/>
-        </a:xfrm>
-      </p:grpSpPr>
+      <p:grpSpPr/>
       <p:sp>
         <p:nvSpPr>
           <p:cNvPr id="2" name="Title 1"/>
@@ -8127,9 +7799,7 @@
           </a:xfrm>
         </p:spPr>
         <p:txBody>
-          <a:bodyPr wrap="square" lIns="109728" tIns="91440" rIns="109728" bIns="91440">
-            <a:normAutofit/>
-          </a:bodyPr>
+          <a:bodyPr wrap="square" lIns="109728" rIns="109728" tIns="91440" bIns="91440"/>
           <a:lstStyle/>
           <a:p>
             <a:pPr>
@@ -8141,7 +7811,7 @@
               </a:spcAft>
             </a:pPr>
             <a:r>
-              <a:rPr sz="2400" b="0" i="0" dirty="0">
+              <a:rPr sz="1500" b="0" i="0">
                 <a:solidFill>
                   <a:srgbClr val="1A1A2E"/>
                 </a:solidFill>
@@ -8160,7 +7830,7 @@
               </a:spcAft>
             </a:pPr>
             <a:r>
-              <a:rPr sz="2400" b="0" i="0" dirty="0">
+              <a:rPr sz="1500" b="0" i="0">
                 <a:solidFill>
                   <a:srgbClr val="1A1A2E"/>
                 </a:solidFill>
@@ -8169,7 +7839,7 @@
               <a:t>Run command: </a:t>
             </a:r>
             <a:r>
-              <a:rPr sz="2400" b="1" i="0" dirty="0">
+              <a:rPr sz="1500" b="1" i="0">
                 <a:solidFill>
                   <a:srgbClr val="1F497D"/>
                 </a:solidFill>
@@ -8188,31 +7858,13 @@
               </a:spcAft>
             </a:pPr>
             <a:r>
-              <a:rPr sz="2400" b="0" i="0" dirty="0">
+              <a:rPr sz="1500" b="0" i="0">
                 <a:solidFill>
                   <a:srgbClr val="1A1A2E"/>
                 </a:solidFill>
                 <a:latin typeface="Calibri"/>
               </a:rPr>
-              <a:t>Submits the selected command(s) to the connected IBM </a:t>
-            </a:r>
-            <a:r>
-              <a:rPr sz="2400" b="0" i="0" dirty="0" err="1">
-                <a:solidFill>
-                  <a:srgbClr val="1A1A2E"/>
-                </a:solidFill>
-                <a:latin typeface="Calibri"/>
-              </a:rPr>
-              <a:t>i</a:t>
-            </a:r>
-            <a:r>
-              <a:rPr sz="2400" b="0" i="0" dirty="0">
-                <a:solidFill>
-                  <a:srgbClr val="1A1A2E"/>
-                </a:solidFill>
-                <a:latin typeface="Calibri"/>
-              </a:rPr>
-              <a:t> for execution</a:t>
+              <a:t>Submits the selected command(s) to the connected IBM i for execution</a:t>
             </a:r>
           </a:p>
           <a:p>
@@ -8225,7 +7877,7 @@
               </a:spcAft>
             </a:pPr>
             <a:r>
-              <a:rPr sz="2400" b="0" i="0" dirty="0">
+              <a:rPr sz="1500" b="0" i="0">
                 <a:solidFill>
                   <a:srgbClr val="1A1A2E"/>
                 </a:solidFill>
@@ -8234,7 +7886,7 @@
               <a:t>Output appears in the VS Code </a:t>
             </a:r>
             <a:r>
-              <a:rPr sz="2400" b="1" i="0" dirty="0">
+              <a:rPr sz="1500" b="1" i="0">
                 <a:solidFill>
                   <a:srgbClr val="1F497D"/>
                 </a:solidFill>
@@ -8243,7 +7895,7 @@
               <a:t>Output</a:t>
             </a:r>
             <a:r>
-              <a:rPr sz="2400" b="0" i="0" dirty="0">
+              <a:rPr sz="1500" b="0" i="0">
                 <a:solidFill>
                   <a:srgbClr val="1A1A2E"/>
                 </a:solidFill>
@@ -8252,7 +7904,7 @@
               <a:t> or </a:t>
             </a:r>
             <a:r>
-              <a:rPr sz="2400" b="1" i="0" dirty="0">
+              <a:rPr sz="1500" b="1" i="0">
                 <a:solidFill>
                   <a:srgbClr val="1F497D"/>
                 </a:solidFill>
@@ -8261,7 +7913,7 @@
               <a:t>Terminal</a:t>
             </a:r>
             <a:r>
-              <a:rPr sz="2400" b="0" i="0" dirty="0">
+              <a:rPr sz="1500" b="0" i="0">
                 <a:solidFill>
                   <a:srgbClr val="1A1A2E"/>
                 </a:solidFill>
@@ -8280,7 +7932,7 @@
               </a:spcAft>
             </a:pPr>
             <a:r>
-              <a:rPr sz="2400" b="0" i="0" dirty="0">
+              <a:rPr sz="1500" b="0" i="0">
                 <a:solidFill>
                   <a:srgbClr val="1A1A2E"/>
                 </a:solidFill>
@@ -8300,7 +7952,7 @@
 </file>
 
 <file path=ppt/slides/slide11.xml><?xml version="1.0" encoding="utf-8"?>
-<p:sld xmlns:a="http://schemas.openxmlformats.org/drawingml/2006/main" xmlns:r="http://schemas.openxmlformats.org/officeDocument/2006/relationships" xmlns:p="http://schemas.openxmlformats.org/presentationml/2006/main">
+<p:sld xmlns:a="http://schemas.openxmlformats.org/drawingml/2006/main" xmlns:p="http://schemas.openxmlformats.org/presentationml/2006/main" xmlns:r="http://schemas.openxmlformats.org/officeDocument/2006/relationships">
   <p:cSld>
     <p:spTree>
       <p:nvGrpSpPr>
@@ -8308,14 +7960,7 @@
         <p:cNvGrpSpPr/>
         <p:nvPr/>
       </p:nvGrpSpPr>
-      <p:grpSpPr>
-        <a:xfrm>
-          <a:off x="0" y="0"/>
-          <a:ext cx="0" cy="0"/>
-          <a:chOff x="0" y="0"/>
-          <a:chExt cx="0" cy="0"/>
-        </a:xfrm>
-      </p:grpSpPr>
+      <p:grpSpPr/>
       <p:sp>
         <p:nvSpPr>
           <p:cNvPr id="2" name="Title 1"/>
@@ -8355,9 +8000,7 @@
           </a:xfrm>
         </p:spPr>
         <p:txBody>
-          <a:bodyPr wrap="square" lIns="109728" tIns="91440" rIns="109728" bIns="91440">
-            <a:normAutofit/>
-          </a:bodyPr>
+          <a:bodyPr wrap="square" lIns="109728" rIns="109728" tIns="91440" bIns="91440"/>
           <a:lstStyle/>
           <a:p>
             <a:pPr>
@@ -8369,7 +8012,7 @@
               </a:spcAft>
             </a:pPr>
             <a:r>
-              <a:rPr sz="2400" b="0" i="0" dirty="0">
+              <a:rPr sz="1500" b="0" i="0">
                 <a:solidFill>
                   <a:srgbClr val="1A1A2E"/>
                 </a:solidFill>
@@ -8378,7 +8021,7 @@
               <a:t>Type a keyword and press </a:t>
             </a:r>
             <a:r>
-              <a:rPr sz="2400" b="1" i="0" dirty="0">
+              <a:rPr sz="1500" b="1" i="0">
                 <a:solidFill>
                   <a:srgbClr val="1F497D"/>
                 </a:solidFill>
@@ -8387,7 +8030,7 @@
               <a:t>Tab</a:t>
             </a:r>
             <a:r>
-              <a:rPr sz="2400" b="0" i="0" dirty="0">
+              <a:rPr sz="1500" b="0" i="0">
                 <a:solidFill>
                   <a:srgbClr val="1A1A2E"/>
                 </a:solidFill>
@@ -8404,16 +8047,10 @@
           <p:cNvGraphicFramePr>
             <a:graphicFrameLocks noGrp="1"/>
           </p:cNvGraphicFramePr>
-          <p:nvPr>
-            <p:extLst>
-              <p:ext uri="{D42A27DB-BD31-4B8C-83A1-F6EECF244321}">
-                <p14:modId xmlns:p14="http://schemas.microsoft.com/office/powerpoint/2010/main" val="704263810"/>
-              </p:ext>
-            </p:extLst>
-          </p:nvPr>
+          <p:nvPr/>
         </p:nvGraphicFramePr>
         <p:xfrm>
-          <a:off x="457200" y="2258569"/>
+          <a:off x="457200" y="2880360"/>
           <a:ext cx="11247120" cy="3621024"/>
         </p:xfrm>
         <a:graphic>
@@ -8423,29 +8060,17 @@
                 <a:tableStyleId>{5C22544A-7EE6-4342-B048-85BDC9FD1C3A}</a:tableStyleId>
               </a:tblPr>
               <a:tblGrid>
-                <a:gridCol w="1491916">
-                  <a:extLst>
-                    <a:ext uri="{9D8B030D-6E8A-4147-A177-3AD203B41FA5}">
-                      <a16:colId xmlns:a16="http://schemas.microsoft.com/office/drawing/2014/main" val="20000"/>
-                    </a:ext>
-                  </a:extLst>
-                </a:gridCol>
-                <a:gridCol w="9755204">
-                  <a:extLst>
-                    <a:ext uri="{9D8B030D-6E8A-4147-A177-3AD203B41FA5}">
-                      <a16:colId xmlns:a16="http://schemas.microsoft.com/office/drawing/2014/main" val="20001"/>
-                    </a:ext>
-                  </a:extLst>
-                </a:gridCol>
+                <a:gridCol w="5623560"/>
+                <a:gridCol w="5623560"/>
               </a:tblGrid>
               <a:tr h="402336">
                 <a:tc>
                   <a:txBody>
-                    <a:bodyPr/>
+                    <a:bodyPr wrap="square"/>
                     <a:lstStyle/>
                     <a:p>
                       <a:r>
-                        <a:rPr sz="1600" b="1" dirty="0">
+                        <a:rPr sz="1200" b="1">
                           <a:solidFill>
                             <a:srgbClr val="FFFFFF"/>
                           </a:solidFill>
@@ -8463,11 +8088,11 @@
                 </a:tc>
                 <a:tc>
                   <a:txBody>
-                    <a:bodyPr/>
+                    <a:bodyPr wrap="square"/>
                     <a:lstStyle/>
                     <a:p>
                       <a:r>
-                        <a:rPr sz="1600" b="1">
+                        <a:rPr sz="1200" b="1">
                           <a:solidFill>
                             <a:srgbClr val="FFFFFF"/>
                           </a:solidFill>
@@ -8483,20 +8108,15 @@
                     </a:solidFill>
                   </a:tcPr>
                 </a:tc>
-                <a:extLst>
-                  <a:ext uri="{0D108BD9-81ED-4DB2-BD59-A6C34878D82A}">
-                    <a16:rowId xmlns:a16="http://schemas.microsoft.com/office/drawing/2014/main" val="10000"/>
-                  </a:ext>
-                </a:extLst>
               </a:tr>
               <a:tr h="402336">
                 <a:tc>
                   <a:txBody>
-                    <a:bodyPr/>
+                    <a:bodyPr wrap="square"/>
                     <a:lstStyle/>
                     <a:p>
                       <a:r>
-                        <a:rPr sz="1600" dirty="0">
+                        <a:rPr sz="1200">
                           <a:solidFill>
                             <a:srgbClr val="1A1A2E"/>
                           </a:solidFill>
@@ -8510,11 +8130,11 @@
                 </a:tc>
                 <a:tc>
                   <a:txBody>
-                    <a:bodyPr/>
+                    <a:bodyPr wrap="square"/>
                     <a:lstStyle/>
                     <a:p>
                       <a:r>
-                        <a:rPr sz="1600" dirty="0">
+                        <a:rPr sz="1200">
                           <a:solidFill>
                             <a:srgbClr val="1A1A2E"/>
                           </a:solidFill>
@@ -8526,20 +8146,15 @@
                   </a:txBody>
                   <a:tcPr/>
                 </a:tc>
-                <a:extLst>
-                  <a:ext uri="{0D108BD9-81ED-4DB2-BD59-A6C34878D82A}">
-                    <a16:rowId xmlns:a16="http://schemas.microsoft.com/office/drawing/2014/main" val="10001"/>
-                  </a:ext>
-                </a:extLst>
               </a:tr>
               <a:tr h="402336">
                 <a:tc>
                   <a:txBody>
-                    <a:bodyPr/>
+                    <a:bodyPr wrap="square"/>
                     <a:lstStyle/>
                     <a:p>
                       <a:r>
-                        <a:rPr sz="1600">
+                        <a:rPr sz="1200">
                           <a:solidFill>
                             <a:srgbClr val="1A1A2E"/>
                           </a:solidFill>
@@ -8557,11 +8172,11 @@
                 </a:tc>
                 <a:tc>
                   <a:txBody>
-                    <a:bodyPr/>
+                    <a:bodyPr wrap="square"/>
                     <a:lstStyle/>
                     <a:p>
                       <a:r>
-                        <a:rPr sz="1600" dirty="0">
+                        <a:rPr sz="1200">
                           <a:solidFill>
                             <a:srgbClr val="1A1A2E"/>
                           </a:solidFill>
@@ -8577,20 +8192,15 @@
                     </a:solidFill>
                   </a:tcPr>
                 </a:tc>
-                <a:extLst>
-                  <a:ext uri="{0D108BD9-81ED-4DB2-BD59-A6C34878D82A}">
-                    <a16:rowId xmlns:a16="http://schemas.microsoft.com/office/drawing/2014/main" val="10002"/>
-                  </a:ext>
-                </a:extLst>
               </a:tr>
               <a:tr h="402336">
                 <a:tc>
                   <a:txBody>
-                    <a:bodyPr/>
+                    <a:bodyPr wrap="square"/>
                     <a:lstStyle/>
                     <a:p>
                       <a:r>
-                        <a:rPr sz="1600">
+                        <a:rPr sz="1200">
                           <a:solidFill>
                             <a:srgbClr val="1A1A2E"/>
                           </a:solidFill>
@@ -8604,11 +8214,11 @@
                 </a:tc>
                 <a:tc>
                   <a:txBody>
-                    <a:bodyPr/>
+                    <a:bodyPr wrap="square"/>
                     <a:lstStyle/>
                     <a:p>
                       <a:r>
-                        <a:rPr sz="1600" dirty="0">
+                        <a:rPr sz="1200">
                           <a:solidFill>
                             <a:srgbClr val="1A1A2E"/>
                           </a:solidFill>
@@ -8620,20 +8230,15 @@
                   </a:txBody>
                   <a:tcPr/>
                 </a:tc>
-                <a:extLst>
-                  <a:ext uri="{0D108BD9-81ED-4DB2-BD59-A6C34878D82A}">
-                    <a16:rowId xmlns:a16="http://schemas.microsoft.com/office/drawing/2014/main" val="10003"/>
-                  </a:ext>
-                </a:extLst>
               </a:tr>
               <a:tr h="402336">
                 <a:tc>
                   <a:txBody>
-                    <a:bodyPr/>
+                    <a:bodyPr wrap="square"/>
                     <a:lstStyle/>
                     <a:p>
                       <a:r>
-                        <a:rPr sz="1600">
+                        <a:rPr sz="1200">
                           <a:solidFill>
                             <a:srgbClr val="1A1A2E"/>
                           </a:solidFill>
@@ -8651,11 +8256,11 @@
                 </a:tc>
                 <a:tc>
                   <a:txBody>
-                    <a:bodyPr/>
+                    <a:bodyPr wrap="square"/>
                     <a:lstStyle/>
                     <a:p>
                       <a:r>
-                        <a:rPr sz="1600" dirty="0">
+                        <a:rPr sz="1200">
                           <a:solidFill>
                             <a:srgbClr val="1A1A2E"/>
                           </a:solidFill>
@@ -8671,20 +8276,15 @@
                     </a:solidFill>
                   </a:tcPr>
                 </a:tc>
-                <a:extLst>
-                  <a:ext uri="{0D108BD9-81ED-4DB2-BD59-A6C34878D82A}">
-                    <a16:rowId xmlns:a16="http://schemas.microsoft.com/office/drawing/2014/main" val="10004"/>
-                  </a:ext>
-                </a:extLst>
               </a:tr>
               <a:tr h="402336">
                 <a:tc>
                   <a:txBody>
-                    <a:bodyPr/>
+                    <a:bodyPr wrap="square"/>
                     <a:lstStyle/>
                     <a:p>
                       <a:r>
-                        <a:rPr sz="1600">
+                        <a:rPr sz="1200">
                           <a:solidFill>
                             <a:srgbClr val="1A1A2E"/>
                           </a:solidFill>
@@ -8698,11 +8298,11 @@
                 </a:tc>
                 <a:tc>
                   <a:txBody>
-                    <a:bodyPr/>
+                    <a:bodyPr wrap="square"/>
                     <a:lstStyle/>
                     <a:p>
                       <a:r>
-                        <a:rPr sz="1600" dirty="0">
+                        <a:rPr sz="1200">
                           <a:solidFill>
                             <a:srgbClr val="1A1A2E"/>
                           </a:solidFill>
@@ -8714,20 +8314,15 @@
                   </a:txBody>
                   <a:tcPr/>
                 </a:tc>
-                <a:extLst>
-                  <a:ext uri="{0D108BD9-81ED-4DB2-BD59-A6C34878D82A}">
-                    <a16:rowId xmlns:a16="http://schemas.microsoft.com/office/drawing/2014/main" val="10005"/>
-                  </a:ext>
-                </a:extLst>
               </a:tr>
               <a:tr h="402336">
                 <a:tc>
                   <a:txBody>
-                    <a:bodyPr/>
+                    <a:bodyPr wrap="square"/>
                     <a:lstStyle/>
                     <a:p>
                       <a:r>
-                        <a:rPr sz="1600">
+                        <a:rPr sz="1200">
                           <a:solidFill>
                             <a:srgbClr val="1A1A2E"/>
                           </a:solidFill>
@@ -8745,11 +8340,11 @@
                 </a:tc>
                 <a:tc>
                   <a:txBody>
-                    <a:bodyPr/>
+                    <a:bodyPr wrap="square"/>
                     <a:lstStyle/>
                     <a:p>
                       <a:r>
-                        <a:rPr sz="1600" dirty="0">
+                        <a:rPr sz="1200">
                           <a:solidFill>
                             <a:srgbClr val="1A1A2E"/>
                           </a:solidFill>
@@ -8765,20 +8360,15 @@
                     </a:solidFill>
                   </a:tcPr>
                 </a:tc>
-                <a:extLst>
-                  <a:ext uri="{0D108BD9-81ED-4DB2-BD59-A6C34878D82A}">
-                    <a16:rowId xmlns:a16="http://schemas.microsoft.com/office/drawing/2014/main" val="10006"/>
-                  </a:ext>
-                </a:extLst>
               </a:tr>
               <a:tr h="402336">
                 <a:tc>
                   <a:txBody>
-                    <a:bodyPr/>
+                    <a:bodyPr wrap="square"/>
                     <a:lstStyle/>
                     <a:p>
                       <a:r>
-                        <a:rPr sz="1600">
+                        <a:rPr sz="1200">
                           <a:solidFill>
                             <a:srgbClr val="1A1A2E"/>
                           </a:solidFill>
@@ -8792,11 +8382,11 @@
                 </a:tc>
                 <a:tc>
                   <a:txBody>
-                    <a:bodyPr/>
+                    <a:bodyPr wrap="square"/>
                     <a:lstStyle/>
                     <a:p>
                       <a:r>
-                        <a:rPr sz="1600" dirty="0">
+                        <a:rPr sz="1200">
                           <a:solidFill>
                             <a:srgbClr val="1A1A2E"/>
                           </a:solidFill>
@@ -8808,20 +8398,15 @@
                   </a:txBody>
                   <a:tcPr/>
                 </a:tc>
-                <a:extLst>
-                  <a:ext uri="{0D108BD9-81ED-4DB2-BD59-A6C34878D82A}">
-                    <a16:rowId xmlns:a16="http://schemas.microsoft.com/office/drawing/2014/main" val="10007"/>
-                  </a:ext>
-                </a:extLst>
               </a:tr>
               <a:tr h="402336">
                 <a:tc>
                   <a:txBody>
-                    <a:bodyPr/>
+                    <a:bodyPr wrap="square"/>
                     <a:lstStyle/>
                     <a:p>
                       <a:r>
-                        <a:rPr sz="1600">
+                        <a:rPr sz="1200">
                           <a:solidFill>
                             <a:srgbClr val="1A1A2E"/>
                           </a:solidFill>
@@ -8839,11 +8424,11 @@
                 </a:tc>
                 <a:tc>
                   <a:txBody>
-                    <a:bodyPr/>
+                    <a:bodyPr wrap="square"/>
                     <a:lstStyle/>
                     <a:p>
                       <a:r>
-                        <a:rPr sz="1600" dirty="0">
+                        <a:rPr sz="1200">
                           <a:solidFill>
                             <a:srgbClr val="1A1A2E"/>
                           </a:solidFill>
@@ -8859,11 +8444,6 @@
                     </a:solidFill>
                   </a:tcPr>
                 </a:tc>
-                <a:extLst>
-                  <a:ext uri="{0D108BD9-81ED-4DB2-BD59-A6C34878D82A}">
-                    <a16:rowId xmlns:a16="http://schemas.microsoft.com/office/drawing/2014/main" val="10008"/>
-                  </a:ext>
-                </a:extLst>
               </a:tr>
             </a:tbl>
           </a:graphicData>
@@ -8878,7 +8458,7 @@
 </file>
 
 <file path=ppt/slides/slide12.xml><?xml version="1.0" encoding="utf-8"?>
-<p:sld xmlns:a="http://schemas.openxmlformats.org/drawingml/2006/main" xmlns:r="http://schemas.openxmlformats.org/officeDocument/2006/relationships" xmlns:p="http://schemas.openxmlformats.org/presentationml/2006/main">
+<p:sld xmlns:a="http://schemas.openxmlformats.org/drawingml/2006/main" xmlns:p="http://schemas.openxmlformats.org/presentationml/2006/main" xmlns:r="http://schemas.openxmlformats.org/officeDocument/2006/relationships">
   <p:cSld>
     <p:spTree>
       <p:nvGrpSpPr>
@@ -8886,14 +8466,7 @@
         <p:cNvGrpSpPr/>
         <p:nvPr/>
       </p:nvGrpSpPr>
-      <p:grpSpPr>
-        <a:xfrm>
-          <a:off x="0" y="0"/>
-          <a:ext cx="0" cy="0"/>
-          <a:chOff x="0" y="0"/>
-          <a:chExt cx="0" cy="0"/>
-        </a:xfrm>
-      </p:grpSpPr>
+      <p:grpSpPr/>
       <p:sp>
         <p:nvSpPr>
           <p:cNvPr id="2" name="Title 1"/>
@@ -8933,9 +8506,7 @@
           </a:xfrm>
         </p:spPr>
         <p:txBody>
-          <a:bodyPr wrap="square" lIns="109728" tIns="91440" rIns="109728" bIns="91440">
-            <a:normAutofit/>
-          </a:bodyPr>
+          <a:bodyPr wrap="square" lIns="109728" rIns="109728" tIns="91440" bIns="91440"/>
           <a:lstStyle/>
           <a:p>
             <a:pPr>
@@ -8947,7 +8518,7 @@
               </a:spcAft>
             </a:pPr>
             <a:r>
-              <a:rPr sz="2400" b="0" i="0" dirty="0">
+              <a:rPr sz="1500" b="0" i="0">
                 <a:solidFill>
                   <a:srgbClr val="1A1A2E"/>
                 </a:solidFill>
@@ -8956,7 +8527,7 @@
               <a:t>IBM CLLE is designed to work </a:t>
             </a:r>
             <a:r>
-              <a:rPr sz="2400" b="1" i="0" dirty="0">
+              <a:rPr sz="1500" b="1" i="0">
                 <a:solidFill>
                   <a:srgbClr val="1F497D"/>
                 </a:solidFill>
@@ -8965,29 +8536,14 @@
               <a:t>alongside</a:t>
             </a:r>
             <a:r>
-              <a:rPr sz="2400" b="0" i="0" dirty="0">
+              <a:rPr sz="1500" b="0" i="0">
                 <a:solidFill>
                   <a:srgbClr val="1A1A2E"/>
                 </a:solidFill>
                 <a:latin typeface="Calibri"/>
               </a:rPr>
-              <a:t> Code for IBM </a:t>
-            </a:r>
-            <a:r>
-              <a:rPr sz="2400" b="0" i="0" dirty="0" err="1">
-                <a:solidFill>
-                  <a:srgbClr val="1A1A2E"/>
-                </a:solidFill>
-                <a:latin typeface="Calibri"/>
-              </a:rPr>
-              <a:t>i</a:t>
-            </a:r>
-            <a:endParaRPr sz="2400" b="0" i="0" dirty="0">
-              <a:solidFill>
-                <a:srgbClr val="1A1A2E"/>
-              </a:solidFill>
-              <a:latin typeface="Calibri"/>
-            </a:endParaRPr>
+              <a:t> Code for IBM i</a:t>
+            </a:r>
           </a:p>
           <a:p>
             <a:pPr>
@@ -8999,52 +8555,16 @@
               </a:spcAft>
             </a:pPr>
             <a:r>
-              <a:rPr sz="2400" b="0" i="0" dirty="0">
+              <a:rPr sz="1500" b="0" i="0">
                 <a:solidFill>
                   <a:srgbClr val="1A1A2E"/>
                 </a:solidFill>
                 <a:latin typeface="Calibri"/>
               </a:rPr>
-              <a:t>Code for IBM </a:t>
-            </a:r>
-            <a:r>
-              <a:rPr sz="2400" b="0" i="0" dirty="0" err="1">
-                <a:solidFill>
-                  <a:srgbClr val="1A1A2E"/>
-                </a:solidFill>
-                <a:latin typeface="Calibri"/>
-              </a:rPr>
-              <a:t>i</a:t>
-            </a:r>
-            <a:r>
-              <a:rPr sz="2400" b="0" i="0" dirty="0">
-                <a:solidFill>
-                  <a:srgbClr val="1A1A2E"/>
-                </a:solidFill>
-                <a:latin typeface="Calibri"/>
-              </a:rPr>
-              <a:t> provides the IBM </a:t>
-            </a:r>
-            <a:r>
-              <a:rPr sz="2400" b="0" i="0" dirty="0" err="1">
-                <a:solidFill>
-                  <a:srgbClr val="1A1A2E"/>
-                </a:solidFill>
-                <a:latin typeface="Calibri"/>
-              </a:rPr>
-              <a:t>i</a:t>
-            </a:r>
-            <a:r>
-              <a:rPr sz="2400" b="0" i="0" dirty="0">
-                <a:solidFill>
-                  <a:srgbClr val="1A1A2E"/>
-                </a:solidFill>
-                <a:latin typeface="Calibri"/>
-              </a:rPr>
-              <a:t> </a:t>
-            </a:r>
-            <a:r>
-              <a:rPr sz="2400" b="1" i="0" dirty="0">
+              <a:t>Code for IBM i provides the IBM i </a:t>
+            </a:r>
+            <a:r>
+              <a:rPr sz="1500" b="1" i="0">
                 <a:solidFill>
                   <a:srgbClr val="1F497D"/>
                 </a:solidFill>
@@ -9053,7 +8573,7 @@
               <a:t>connection</a:t>
             </a:r>
             <a:r>
-              <a:rPr sz="2400" b="0" i="0" dirty="0">
+              <a:rPr sz="1500" b="0" i="0">
                 <a:solidFill>
                   <a:srgbClr val="1A1A2E"/>
                 </a:solidFill>
@@ -9072,7 +8592,7 @@
               </a:spcAft>
             </a:pPr>
             <a:r>
-              <a:rPr sz="2400" b="0" i="0" dirty="0">
+              <a:rPr sz="1500" b="0" i="0">
                 <a:solidFill>
                   <a:srgbClr val="1A1A2E"/>
                 </a:solidFill>
@@ -9091,7 +8611,7 @@
               </a:spcAft>
             </a:pPr>
             <a:r>
-              <a:rPr sz="2400" b="0" i="0" dirty="0">
+              <a:rPr sz="1500" b="0" i="0">
                 <a:solidFill>
                   <a:srgbClr val="1A1A2E"/>
                 </a:solidFill>
@@ -9110,7 +8630,7 @@
               </a:spcAft>
             </a:pPr>
             <a:r>
-              <a:rPr sz="2400" b="0" i="0" dirty="0">
+              <a:rPr sz="1500" b="0" i="0">
                 <a:solidFill>
                   <a:srgbClr val="1A1A2E"/>
                 </a:solidFill>
@@ -9129,7 +8649,7 @@
               </a:spcAft>
             </a:pPr>
             <a:r>
-              <a:rPr sz="2400" b="0" i="0" dirty="0">
+              <a:rPr sz="1500" b="0" i="0">
                 <a:solidFill>
                   <a:srgbClr val="1A1A2E"/>
                 </a:solidFill>
@@ -9148,7 +8668,7 @@
               </a:spcAft>
             </a:pPr>
             <a:r>
-              <a:rPr sz="2400" b="0" i="0" dirty="0">
+              <a:rPr sz="1500" b="0" i="0">
                 <a:solidFill>
                   <a:srgbClr val="1A1A2E"/>
                 </a:solidFill>
@@ -9168,7 +8688,7 @@
 </file>
 
 <file path=ppt/slides/slide13.xml><?xml version="1.0" encoding="utf-8"?>
-<p:sld xmlns:a="http://schemas.openxmlformats.org/drawingml/2006/main" xmlns:r="http://schemas.openxmlformats.org/officeDocument/2006/relationships" xmlns:p="http://schemas.openxmlformats.org/presentationml/2006/main">
+<p:sld xmlns:a="http://schemas.openxmlformats.org/drawingml/2006/main" xmlns:p="http://schemas.openxmlformats.org/presentationml/2006/main" xmlns:r="http://schemas.openxmlformats.org/officeDocument/2006/relationships">
   <p:cSld>
     <p:spTree>
       <p:nvGrpSpPr>
@@ -9176,14 +8696,7 @@
         <p:cNvGrpSpPr/>
         <p:nvPr/>
       </p:nvGrpSpPr>
-      <p:grpSpPr>
-        <a:xfrm>
-          <a:off x="0" y="0"/>
-          <a:ext cx="0" cy="0"/>
-          <a:chOff x="0" y="0"/>
-          <a:chExt cx="0" cy="0"/>
-        </a:xfrm>
-      </p:grpSpPr>
+      <p:grpSpPr/>
       <p:sp>
         <p:nvSpPr>
           <p:cNvPr id="2" name="Title 1"/>
@@ -9223,9 +8736,7 @@
           </a:xfrm>
         </p:spPr>
         <p:txBody>
-          <a:bodyPr wrap="square" lIns="109728" tIns="91440" rIns="109728" bIns="91440">
-            <a:normAutofit/>
-          </a:bodyPr>
+          <a:bodyPr wrap="square" lIns="109728" rIns="109728" tIns="91440" bIns="91440"/>
           <a:lstStyle/>
           <a:p>
             <a:pPr>
@@ -9237,7 +8748,7 @@
               </a:spcAft>
             </a:pPr>
             <a:r>
-              <a:rPr sz="2400" b="0" i="0" dirty="0">
+              <a:rPr sz="1500" b="0" i="0">
                 <a:solidFill>
                   <a:srgbClr val="1A1A2E"/>
                 </a:solidFill>
@@ -9256,31 +8767,13 @@
               </a:spcAft>
             </a:pPr>
             <a:r>
-              <a:rPr sz="2400" b="1" i="0" dirty="0">
+              <a:rPr sz="1500" b="1" i="0">
                 <a:solidFill>
                   <a:srgbClr val="1F497D"/>
                 </a:solidFill>
                 <a:latin typeface="Calibri"/>
               </a:rPr>
-              <a:t>`</a:t>
-            </a:r>
-            <a:r>
-              <a:rPr sz="2400" b="1" i="0" dirty="0" err="1">
-                <a:solidFill>
-                  <a:srgbClr val="1F497D"/>
-                </a:solidFill>
-                <a:latin typeface="Calibri"/>
-              </a:rPr>
-              <a:t>vscode-clle.general.displayCommandDocumentation</a:t>
-            </a:r>
-            <a:r>
-              <a:rPr sz="2400" b="1" i="0" dirty="0">
-                <a:solidFill>
-                  <a:srgbClr val="1F497D"/>
-                </a:solidFill>
-                <a:latin typeface="Calibri"/>
-              </a:rPr>
-              <a:t>`</a:t>
+              <a:t>`vscode-clle.general.displayCommandDocumentation`</a:t>
             </a:r>
           </a:p>
           <a:p>
@@ -9293,7 +8786,7 @@
               </a:spcAft>
             </a:pPr>
             <a:r>
-              <a:rPr sz="2400" b="0" i="1" dirty="0">
+              <a:rPr sz="1500" b="0" i="1">
                 <a:solidFill>
                   <a:srgbClr val="666666"/>
                 </a:solidFill>
@@ -9302,7 +8795,7 @@
               <a:t>Default:</a:t>
             </a:r>
             <a:r>
-              <a:rPr sz="2400" b="0" i="0" dirty="0">
+              <a:rPr sz="1500" b="0" i="0">
                 <a:solidFill>
                   <a:srgbClr val="1A1A2E"/>
                 </a:solidFill>
@@ -9321,31 +8814,13 @@
               </a:spcAft>
             </a:pPr>
             <a:r>
-              <a:rPr sz="2400" b="0" i="0" dirty="0">
+              <a:rPr sz="1500" b="0" i="0">
                 <a:solidFill>
                   <a:srgbClr val="1A1A2E"/>
                 </a:solidFill>
                 <a:latin typeface="Calibri"/>
               </a:rPr>
-              <a:t>When on, hover tooltips fetch live IBM </a:t>
-            </a:r>
-            <a:r>
-              <a:rPr sz="2400" b="0" i="0" dirty="0" err="1">
-                <a:solidFill>
-                  <a:srgbClr val="1A1A2E"/>
-                </a:solidFill>
-                <a:latin typeface="Calibri"/>
-              </a:rPr>
-              <a:t>i</a:t>
-            </a:r>
-            <a:r>
-              <a:rPr sz="2400" b="0" i="0" dirty="0">
-                <a:solidFill>
-                  <a:srgbClr val="1A1A2E"/>
-                </a:solidFill>
-                <a:latin typeface="Calibri"/>
-              </a:rPr>
-              <a:t> CL command docs</a:t>
+              <a:t>When on, hover tooltips fetch live IBM i CL command docs</a:t>
             </a:r>
           </a:p>
           <a:p>
@@ -9358,7 +8833,7 @@
               </a:spcAft>
             </a:pPr>
             <a:r>
-              <a:rPr sz="2400" b="0" i="0" dirty="0">
+              <a:rPr sz="1500" b="0" i="0">
                 <a:solidFill>
                   <a:srgbClr val="1A1A2E"/>
                 </a:solidFill>
@@ -9377,7 +8852,7 @@
               </a:spcAft>
             </a:pPr>
             <a:r>
-              <a:rPr sz="2400" b="0" i="0" dirty="0">
+              <a:rPr sz="1500" b="0" i="0">
                 <a:solidFill>
                   <a:srgbClr val="1A1A2E"/>
                 </a:solidFill>
@@ -9397,7 +8872,7 @@
 </file>
 
 <file path=ppt/slides/slide14.xml><?xml version="1.0" encoding="utf-8"?>
-<p:sld xmlns:a="http://schemas.openxmlformats.org/drawingml/2006/main" xmlns:r="http://schemas.openxmlformats.org/officeDocument/2006/relationships" xmlns:p="http://schemas.openxmlformats.org/presentationml/2006/main">
+<p:sld xmlns:a="http://schemas.openxmlformats.org/drawingml/2006/main" xmlns:p="http://schemas.openxmlformats.org/presentationml/2006/main" xmlns:r="http://schemas.openxmlformats.org/officeDocument/2006/relationships">
   <p:cSld>
     <p:spTree>
       <p:nvGrpSpPr>
@@ -9405,14 +8880,7 @@
         <p:cNvGrpSpPr/>
         <p:nvPr/>
       </p:nvGrpSpPr>
-      <p:grpSpPr>
-        <a:xfrm>
-          <a:off x="0" y="0"/>
-          <a:ext cx="0" cy="0"/>
-          <a:chOff x="0" y="0"/>
-          <a:chExt cx="0" cy="0"/>
-        </a:xfrm>
-      </p:grpSpPr>
+      <p:grpSpPr/>
       <p:sp>
         <p:nvSpPr>
           <p:cNvPr id="2" name="Title 1"/>
@@ -9447,14 +8915,12 @@
         </p:nvSpPr>
         <p:spPr>
           <a:xfrm>
-            <a:off x="1106928" y="1508760"/>
-            <a:ext cx="10323095" cy="4398745"/>
+            <a:off x="457200" y="1508760"/>
+            <a:ext cx="11247120" cy="5029200"/>
           </a:xfrm>
         </p:spPr>
         <p:txBody>
-          <a:bodyPr wrap="square" lIns="109728" tIns="91440" rIns="109728" bIns="91440">
-            <a:normAutofit/>
-          </a:bodyPr>
+          <a:bodyPr wrap="square" lIns="109728" rIns="109728" tIns="91440" bIns="91440"/>
           <a:lstStyle/>
           <a:p>
             <a:pPr>
@@ -9466,13 +8932,13 @@
               </a:spcAft>
             </a:pPr>
             <a:r>
-              <a:rPr sz="2400" b="0" i="0" dirty="0">
+              <a:rPr sz="1500" b="0" i="0">
                 <a:solidFill>
                   <a:srgbClr val="1A1A2E"/>
                 </a:solidFill>
                 <a:latin typeface="Calibri"/>
               </a:rPr>
-              <a:t>IBM CLLE transforms VS Code into a first-class CL IDE</a:t>
+              <a:t>IBM CLLE transforms VS Code into a first-class CL IDE:</a:t>
             </a:r>
           </a:p>
           <a:p>
@@ -9485,7 +8951,7 @@
               </a:spcAft>
             </a:pPr>
             <a:r>
-              <a:rPr sz="2400" b="1" i="0" dirty="0">
+              <a:rPr sz="1500" b="1" i="0">
                 <a:solidFill>
                   <a:srgbClr val="1F497D"/>
                 </a:solidFill>
@@ -9494,7 +8960,7 @@
               <a:t>Outline View</a:t>
             </a:r>
             <a:r>
-              <a:rPr sz="2400" b="0" i="0" dirty="0">
+              <a:rPr sz="1500" b="0" i="0">
                 <a:solidFill>
                   <a:srgbClr val="1A1A2E"/>
                 </a:solidFill>
@@ -9513,7 +8979,7 @@
               </a:spcAft>
             </a:pPr>
             <a:r>
-              <a:rPr sz="2400" b="1" i="0" dirty="0">
+              <a:rPr sz="1500" b="1" i="0">
                 <a:solidFill>
                   <a:srgbClr val="1F497D"/>
                 </a:solidFill>
@@ -9522,7 +8988,7 @@
               <a:t>IntelliSense</a:t>
             </a:r>
             <a:r>
-              <a:rPr sz="2400" b="0" i="0" dirty="0">
+              <a:rPr sz="1500" b="0" i="0">
                 <a:solidFill>
                   <a:srgbClr val="1A1A2E"/>
                 </a:solidFill>
@@ -9541,7 +9007,7 @@
               </a:spcAft>
             </a:pPr>
             <a:r>
-              <a:rPr sz="2400" b="1" i="0" dirty="0">
+              <a:rPr sz="1500" b="1" i="0">
                 <a:solidFill>
                   <a:srgbClr val="1F497D"/>
                 </a:solidFill>
@@ -9550,7 +9016,7 @@
               <a:t>Go to Definition / Find References</a:t>
             </a:r>
             <a:r>
-              <a:rPr sz="2400" b="0" i="0" dirty="0">
+              <a:rPr sz="1500" b="0" i="0">
                 <a:solidFill>
                   <a:srgbClr val="1A1A2E"/>
                 </a:solidFill>
@@ -9569,7 +9035,7 @@
               </a:spcAft>
             </a:pPr>
             <a:r>
-              <a:rPr sz="2400" b="1" i="0" dirty="0">
+              <a:rPr sz="1500" b="1" i="0">
                 <a:solidFill>
                   <a:srgbClr val="1F497D"/>
                 </a:solidFill>
@@ -9578,7 +9044,7 @@
               <a:t>Hover docs</a:t>
             </a:r>
             <a:r>
-              <a:rPr sz="2400" b="0" i="0" dirty="0">
+              <a:rPr sz="1500" b="0" i="0">
                 <a:solidFill>
                   <a:srgbClr val="1A1A2E"/>
                 </a:solidFill>
@@ -9586,21 +9052,6 @@
               </a:rPr>
               <a:t> — IBM command documentation inline</a:t>
             </a:r>
-            <a:r>
-              <a:rPr lang="en-US" sz="2400" b="0" i="0" dirty="0">
-                <a:solidFill>
-                  <a:srgbClr val="1A1A2E"/>
-                </a:solidFill>
-                <a:latin typeface="Calibri"/>
-              </a:rPr>
-              <a:t>*</a:t>
-            </a:r>
-            <a:endParaRPr sz="2400" b="0" i="0" dirty="0">
-              <a:solidFill>
-                <a:srgbClr val="1A1A2E"/>
-              </a:solidFill>
-              <a:latin typeface="Calibri"/>
-            </a:endParaRPr>
           </a:p>
           <a:p>
             <a:pPr>
@@ -9612,7 +9063,7 @@
               </a:spcAft>
             </a:pPr>
             <a:r>
-              <a:rPr sz="2400" b="1" i="0" dirty="0">
+              <a:rPr sz="1500" b="1" i="0">
                 <a:solidFill>
                   <a:srgbClr val="1F497D"/>
                 </a:solidFill>
@@ -9621,7 +9072,7 @@
               <a:t>Syntax check</a:t>
             </a:r>
             <a:r>
-              <a:rPr sz="2400" b="0" i="0" dirty="0">
+              <a:rPr sz="1500" b="0" i="0">
                 <a:solidFill>
                   <a:srgbClr val="1A1A2E"/>
                 </a:solidFill>
@@ -9640,7 +9091,7 @@
               </a:spcAft>
             </a:pPr>
             <a:r>
-              <a:rPr sz="2400" b="1" i="0" dirty="0">
+              <a:rPr sz="1500" b="1" i="0">
                 <a:solidFill>
                   <a:srgbClr val="1F497D"/>
                 </a:solidFill>
@@ -9649,7 +9100,7 @@
               <a:t>Run selection</a:t>
             </a:r>
             <a:r>
-              <a:rPr sz="2400" b="0" i="0" dirty="0">
+              <a:rPr sz="1500" b="0" i="0">
                 <a:solidFill>
                   <a:srgbClr val="1A1A2E"/>
                 </a:solidFill>
@@ -9668,7 +9119,7 @@
               </a:spcAft>
             </a:pPr>
             <a:r>
-              <a:rPr sz="2400" b="1" i="0" dirty="0">
+              <a:rPr sz="1500" b="1" i="0">
                 <a:solidFill>
                   <a:srgbClr val="1F497D"/>
                 </a:solidFill>
@@ -9677,7 +9128,7 @@
               <a:t>Snippets</a:t>
             </a:r>
             <a:r>
-              <a:rPr sz="2400" b="0" i="0" dirty="0">
+              <a:rPr sz="1500" b="0" i="0">
                 <a:solidFill>
                   <a:srgbClr val="1A1A2E"/>
                 </a:solidFill>
@@ -9696,64 +9147,13 @@
               </a:spcAft>
             </a:pPr>
             <a:r>
-              <a:rPr sz="2400" b="0" i="0" dirty="0">
+              <a:rPr sz="1500" b="0" i="0">
                 <a:solidFill>
                   <a:srgbClr val="1A1A2E"/>
                 </a:solidFill>
                 <a:latin typeface="Calibri"/>
               </a:rPr>
               <a:t>Free, open source, from IBM</a:t>
-            </a:r>
-          </a:p>
-        </p:txBody>
-      </p:sp>
-      <p:sp>
-        <p:nvSpPr>
-          <p:cNvPr id="4" name="TextBox 3">
-            <a:extLst>
-              <a:ext uri="{FF2B5EF4-FFF2-40B4-BE49-F238E27FC236}">
-                <a16:creationId xmlns:a16="http://schemas.microsoft.com/office/drawing/2014/main" id="{63522905-374F-2705-2F08-6E512ACBCF5E}"/>
-              </a:ext>
-            </a:extLst>
-          </p:cNvPr>
-          <p:cNvSpPr txBox="1"/>
-          <p:nvPr/>
-        </p:nvSpPr>
-        <p:spPr>
-          <a:xfrm>
-            <a:off x="2592925" y="5907505"/>
-            <a:ext cx="7555831" cy="646331"/>
-          </a:xfrm>
-          <a:prstGeom prst="rect">
-            <a:avLst/>
-          </a:prstGeom>
-          <a:noFill/>
-        </p:spPr>
-        <p:txBody>
-          <a:bodyPr wrap="square" rtlCol="0">
-            <a:spAutoFit/>
-          </a:bodyPr>
-          <a:lstStyle/>
-          <a:p>
-            <a:r>
-              <a:rPr lang="en-US" dirty="0"/>
-              <a:t>* The actual command </a:t>
-            </a:r>
-            <a:r>
-              <a:rPr lang="en-US" dirty="0" err="1"/>
-              <a:t>Helptext</a:t>
-            </a:r>
-            <a:r>
-              <a:rPr lang="en-US" dirty="0"/>
-              <a:t> from the IBM </a:t>
-            </a:r>
-            <a:r>
-              <a:rPr lang="en-US" dirty="0" err="1"/>
-              <a:t>i</a:t>
-            </a:r>
-            <a:r>
-              <a:rPr lang="en-US" dirty="0"/>
-              <a:t> host is retrieved and presented. Similar to pressing F1 during a command Prompt.</a:t>
             </a:r>
           </a:p>
         </p:txBody>
@@ -9767,7 +9167,7 @@
 </file>
 
 <file path=ppt/slides/slide2.xml><?xml version="1.0" encoding="utf-8"?>
-<p:sld xmlns:a="http://schemas.openxmlformats.org/drawingml/2006/main" xmlns:r="http://schemas.openxmlformats.org/officeDocument/2006/relationships" xmlns:p="http://schemas.openxmlformats.org/presentationml/2006/main">
+<p:sld xmlns:a="http://schemas.openxmlformats.org/drawingml/2006/main" xmlns:p="http://schemas.openxmlformats.org/presentationml/2006/main" xmlns:r="http://schemas.openxmlformats.org/officeDocument/2006/relationships">
   <p:cSld>
     <p:spTree>
       <p:nvGrpSpPr>
@@ -9775,14 +9175,7 @@
         <p:cNvGrpSpPr/>
         <p:nvPr/>
       </p:nvGrpSpPr>
-      <p:grpSpPr>
-        <a:xfrm>
-          <a:off x="0" y="0"/>
-          <a:ext cx="0" cy="0"/>
-          <a:chOff x="0" y="0"/>
-          <a:chExt cx="0" cy="0"/>
-        </a:xfrm>
-      </p:grpSpPr>
+      <p:grpSpPr/>
       <p:sp>
         <p:nvSpPr>
           <p:cNvPr id="2" name="Title 1"/>
@@ -9822,9 +9215,7 @@
           </a:xfrm>
         </p:spPr>
         <p:txBody>
-          <a:bodyPr wrap="square" lIns="109728" tIns="91440" rIns="109728" bIns="91440">
-            <a:normAutofit/>
-          </a:bodyPr>
+          <a:bodyPr wrap="square" lIns="109728" rIns="109728" tIns="91440" bIns="91440"/>
           <a:lstStyle/>
           <a:p>
             <a:pPr>
@@ -9836,7 +9227,7 @@
               </a:spcAft>
             </a:pPr>
             <a:r>
-              <a:rPr sz="2400" b="1" i="0" dirty="0">
+              <a:rPr sz="1500" b="1" i="0">
                 <a:solidFill>
                   <a:srgbClr val="1F497D"/>
                 </a:solidFill>
@@ -9845,31 +9236,13 @@
               <a:t>CL (Control Language)</a:t>
             </a:r>
             <a:r>
-              <a:rPr sz="2400" b="0" i="0" dirty="0">
+              <a:rPr sz="1500" b="0" i="0">
                 <a:solidFill>
                   <a:srgbClr val="1A1A2E"/>
                 </a:solidFill>
                 <a:latin typeface="Calibri"/>
               </a:rPr>
-              <a:t> is the command language of IBM </a:t>
-            </a:r>
-            <a:r>
-              <a:rPr sz="2400" b="0" i="0" dirty="0" err="1">
-                <a:solidFill>
-                  <a:srgbClr val="1A1A2E"/>
-                </a:solidFill>
-                <a:latin typeface="Calibri"/>
-              </a:rPr>
-              <a:t>i</a:t>
-            </a:r>
-            <a:r>
-              <a:rPr sz="2400" b="0" i="0" dirty="0">
-                <a:solidFill>
-                  <a:srgbClr val="1A1A2E"/>
-                </a:solidFill>
-                <a:latin typeface="Calibri"/>
-              </a:rPr>
-              <a:t> (AS/400)</a:t>
+              <a:t> is the command language of IBM i (AS/400)</a:t>
             </a:r>
           </a:p>
           <a:p>
@@ -9882,7 +9255,7 @@
               </a:spcAft>
             </a:pPr>
             <a:r>
-              <a:rPr sz="2400" b="0" i="0" dirty="0">
+              <a:rPr sz="1500" b="0" i="0">
                 <a:solidFill>
                   <a:srgbClr val="1A1A2E"/>
                 </a:solidFill>
@@ -9901,7 +9274,7 @@
               </a:spcAft>
             </a:pPr>
             <a:r>
-              <a:rPr sz="2400" b="0" i="0" dirty="0">
+              <a:rPr sz="1500" b="0" i="0">
                 <a:solidFill>
                   <a:srgbClr val="1A1A2E"/>
                 </a:solidFill>
@@ -9910,7 +9283,7 @@
               <a:t>Compiled into CL programs (</a:t>
             </a:r>
             <a:r>
-              <a:rPr sz="2400" b="0" i="0" dirty="0">
+              <a:rPr sz="1300" b="0" i="0">
                 <a:solidFill>
                   <a:srgbClr val="B5204F"/>
                 </a:solidFill>
@@ -9919,7 +9292,7 @@
               <a:t>.CLLE</a:t>
             </a:r>
             <a:r>
-              <a:rPr sz="2400" b="0" i="0" dirty="0">
+              <a:rPr sz="1500" b="0" i="0">
                 <a:solidFill>
                   <a:srgbClr val="1A1A2E"/>
                 </a:solidFill>
@@ -9928,7 +9301,7 @@
               <a:t>) or used in </a:t>
             </a:r>
             <a:r>
-              <a:rPr sz="2400" b="0" i="0" dirty="0">
+              <a:rPr sz="1300" b="0" i="0">
                 <a:solidFill>
                   <a:srgbClr val="B5204F"/>
                 </a:solidFill>
@@ -9937,7 +9310,7 @@
               <a:t>.CMD</a:t>
             </a:r>
             <a:r>
-              <a:rPr sz="2400" b="0" i="0" dirty="0">
+              <a:rPr sz="1500" b="0" i="0">
                 <a:solidFill>
                   <a:srgbClr val="1A1A2E"/>
                 </a:solidFill>
@@ -9956,31 +9329,13 @@
               </a:spcAft>
             </a:pPr>
             <a:r>
-              <a:rPr sz="2400" b="0" i="0" dirty="0">
+              <a:rPr sz="1500" b="0" i="0">
                 <a:solidFill>
                   <a:srgbClr val="1A1A2E"/>
                 </a:solidFill>
                 <a:latin typeface="Calibri"/>
               </a:rPr>
-              <a:t>CL still powers thousands of production IBM </a:t>
-            </a:r>
-            <a:r>
-              <a:rPr sz="2400" b="0" i="0" dirty="0" err="1">
-                <a:solidFill>
-                  <a:srgbClr val="1A1A2E"/>
-                </a:solidFill>
-                <a:latin typeface="Calibri"/>
-              </a:rPr>
-              <a:t>i</a:t>
-            </a:r>
-            <a:r>
-              <a:rPr sz="2400" b="0" i="0" dirty="0">
-                <a:solidFill>
-                  <a:srgbClr val="1A1A2E"/>
-                </a:solidFill>
-                <a:latin typeface="Calibri"/>
-              </a:rPr>
-              <a:t> systems</a:t>
+              <a:t>CL still powers thousands of production IBM i systems</a:t>
             </a:r>
           </a:p>
           <a:p>
@@ -9993,31 +9348,13 @@
               </a:spcAft>
             </a:pPr>
             <a:r>
-              <a:rPr sz="2400" b="0" i="0" dirty="0">
+              <a:rPr sz="1500" b="0" i="0">
                 <a:solidFill>
                   <a:srgbClr val="1A1A2E"/>
                 </a:solidFill>
                 <a:latin typeface="Calibri"/>
               </a:rPr>
-              <a:t>Historically edited on 5250 green-screen or </a:t>
-            </a:r>
-            <a:r>
-              <a:rPr sz="2400" b="0" i="0" dirty="0" err="1">
-                <a:solidFill>
-                  <a:srgbClr val="1A1A2E"/>
-                </a:solidFill>
-                <a:latin typeface="Calibri"/>
-              </a:rPr>
-              <a:t>RDi</a:t>
-            </a:r>
-            <a:r>
-              <a:rPr sz="2400" b="0" i="0" dirty="0">
-                <a:solidFill>
-                  <a:srgbClr val="1A1A2E"/>
-                </a:solidFill>
-                <a:latin typeface="Calibri"/>
-              </a:rPr>
-              <a:t> — now VS Code!</a:t>
+              <a:t>Historically edited on 5250 green-screen or RDi — now VS Code!</a:t>
             </a:r>
           </a:p>
         </p:txBody>
@@ -10031,7 +9368,7 @@
 </file>
 
 <file path=ppt/slides/slide3.xml><?xml version="1.0" encoding="utf-8"?>
-<p:sld xmlns:a="http://schemas.openxmlformats.org/drawingml/2006/main" xmlns:r="http://schemas.openxmlformats.org/officeDocument/2006/relationships" xmlns:p="http://schemas.openxmlformats.org/presentationml/2006/main">
+<p:sld xmlns:a="http://schemas.openxmlformats.org/drawingml/2006/main" xmlns:p="http://schemas.openxmlformats.org/presentationml/2006/main" xmlns:r="http://schemas.openxmlformats.org/officeDocument/2006/relationships">
   <p:cSld>
     <p:spTree>
       <p:nvGrpSpPr>
@@ -10039,14 +9376,7 @@
         <p:cNvGrpSpPr/>
         <p:nvPr/>
       </p:nvGrpSpPr>
-      <p:grpSpPr>
-        <a:xfrm>
-          <a:off x="0" y="0"/>
-          <a:ext cx="0" cy="0"/>
-          <a:chOff x="0" y="0"/>
-          <a:chExt cx="0" cy="0"/>
-        </a:xfrm>
-      </p:grpSpPr>
+      <p:grpSpPr/>
       <p:sp>
         <p:nvSpPr>
           <p:cNvPr id="2" name="Title 1"/>
@@ -10086,9 +9416,7 @@
           </a:xfrm>
         </p:spPr>
         <p:txBody>
-          <a:bodyPr wrap="square" lIns="109728" tIns="91440" rIns="109728" bIns="91440">
-            <a:normAutofit/>
-          </a:bodyPr>
+          <a:bodyPr wrap="square" lIns="109728" rIns="109728" tIns="91440" bIns="91440"/>
           <a:lstStyle/>
           <a:p>
             <a:pPr>
@@ -10100,7 +9428,7 @@
               </a:spcAft>
             </a:pPr>
             <a:r>
-              <a:rPr sz="2400" b="1" i="0" dirty="0">
+              <a:rPr sz="1500" b="1" i="0">
                 <a:solidFill>
                   <a:srgbClr val="1F497D"/>
                 </a:solidFill>
@@ -10109,7 +9437,7 @@
               <a:t>Syntax Highlighting</a:t>
             </a:r>
             <a:r>
-              <a:rPr sz="2400" b="0" i="0" dirty="0">
+              <a:rPr sz="1500" b="0" i="0">
                 <a:solidFill>
                   <a:srgbClr val="1A1A2E"/>
                 </a:solidFill>
@@ -10128,7 +9456,7 @@
               </a:spcAft>
             </a:pPr>
             <a:r>
-              <a:rPr sz="2400" b="1" i="0" dirty="0">
+              <a:rPr sz="1500" b="1" i="0">
                 <a:solidFill>
                   <a:srgbClr val="1F497D"/>
                 </a:solidFill>
@@ -10137,7 +9465,7 @@
               <a:t>Outline View</a:t>
             </a:r>
             <a:r>
-              <a:rPr sz="2400" b="0" i="0" dirty="0">
+              <a:rPr sz="1500" b="0" i="0">
                 <a:solidFill>
                   <a:srgbClr val="1A1A2E"/>
                 </a:solidFill>
@@ -10156,7 +9484,7 @@
               </a:spcAft>
             </a:pPr>
             <a:r>
-              <a:rPr sz="2400" b="1" i="0" dirty="0">
+              <a:rPr sz="1500" b="1" i="0">
                 <a:solidFill>
                   <a:srgbClr val="1F497D"/>
                 </a:solidFill>
@@ -10165,7 +9493,7 @@
               <a:t>Content Assist</a:t>
             </a:r>
             <a:r>
-              <a:rPr sz="2400" b="0" i="0" dirty="0">
+              <a:rPr sz="1500" b="0" i="0">
                 <a:solidFill>
                   <a:srgbClr val="1A1A2E"/>
                 </a:solidFill>
@@ -10184,7 +9512,7 @@
               </a:spcAft>
             </a:pPr>
             <a:r>
-              <a:rPr sz="2400" b="1" i="0" dirty="0">
+              <a:rPr sz="1500" b="1" i="0">
                 <a:solidFill>
                   <a:srgbClr val="1F497D"/>
                 </a:solidFill>
@@ -10193,7 +9521,7 @@
               <a:t>Go to / Peek Definition</a:t>
             </a:r>
             <a:r>
-              <a:rPr sz="2400" b="0" i="0" dirty="0">
+              <a:rPr sz="1500" b="0" i="0">
                 <a:solidFill>
                   <a:srgbClr val="1A1A2E"/>
                 </a:solidFill>
@@ -10212,7 +9540,7 @@
               </a:spcAft>
             </a:pPr>
             <a:r>
-              <a:rPr sz="2400" b="1" i="0" dirty="0">
+              <a:rPr sz="1500" b="1" i="0">
                 <a:solidFill>
                   <a:srgbClr val="1F497D"/>
                 </a:solidFill>
@@ -10221,7 +9549,7 @@
               <a:t>Find All References</a:t>
             </a:r>
             <a:r>
-              <a:rPr sz="2400" b="0" i="0" dirty="0">
+              <a:rPr sz="1500" b="0" i="0">
                 <a:solidFill>
                   <a:srgbClr val="1A1A2E"/>
                 </a:solidFill>
@@ -10240,7 +9568,7 @@
               </a:spcAft>
             </a:pPr>
             <a:r>
-              <a:rPr sz="2400" b="1" i="0" dirty="0">
+              <a:rPr sz="1500" b="1" i="0">
                 <a:solidFill>
                   <a:srgbClr val="1F497D"/>
                 </a:solidFill>
@@ -10249,7 +9577,7 @@
               <a:t>Hover Documentation</a:t>
             </a:r>
             <a:r>
-              <a:rPr sz="2400" b="0" i="0" dirty="0">
+              <a:rPr sz="1500" b="0" i="0">
                 <a:solidFill>
                   <a:srgbClr val="1A1A2E"/>
                 </a:solidFill>
@@ -10268,7 +9596,7 @@
               </a:spcAft>
             </a:pPr>
             <a:r>
-              <a:rPr sz="2400" b="1" i="0" dirty="0">
+              <a:rPr sz="1500" b="1" i="0">
                 <a:solidFill>
                   <a:srgbClr val="1F497D"/>
                 </a:solidFill>
@@ -10277,31 +9605,13 @@
               <a:t>Syntax Checking</a:t>
             </a:r>
             <a:r>
-              <a:rPr sz="2400" b="0" i="0" dirty="0">
+              <a:rPr sz="1500" b="0" i="0">
                 <a:solidFill>
                   <a:srgbClr val="1A1A2E"/>
                 </a:solidFill>
                 <a:latin typeface="Calibri"/>
               </a:rPr>
-              <a:t> — validate CL syntax against the IBM </a:t>
-            </a:r>
-            <a:r>
-              <a:rPr sz="2400" b="0" i="0" dirty="0" err="1">
-                <a:solidFill>
-                  <a:srgbClr val="1A1A2E"/>
-                </a:solidFill>
-                <a:latin typeface="Calibri"/>
-              </a:rPr>
-              <a:t>i</a:t>
-            </a:r>
-            <a:r>
-              <a:rPr sz="2400" b="0" i="0" dirty="0">
-                <a:solidFill>
-                  <a:srgbClr val="1A1A2E"/>
-                </a:solidFill>
-                <a:latin typeface="Calibri"/>
-              </a:rPr>
-              <a:t> system</a:t>
+              <a:t> — validate CL syntax against the IBM i system</a:t>
             </a:r>
           </a:p>
         </p:txBody>
@@ -10315,7 +9625,7 @@
 </file>
 
 <file path=ppt/slides/slide4.xml><?xml version="1.0" encoding="utf-8"?>
-<p:sld xmlns:a="http://schemas.openxmlformats.org/drawingml/2006/main" xmlns:r="http://schemas.openxmlformats.org/officeDocument/2006/relationships" xmlns:p="http://schemas.openxmlformats.org/presentationml/2006/main">
+<p:sld xmlns:a="http://schemas.openxmlformats.org/drawingml/2006/main" xmlns:p="http://schemas.openxmlformats.org/presentationml/2006/main" xmlns:r="http://schemas.openxmlformats.org/officeDocument/2006/relationships">
   <p:cSld>
     <p:spTree>
       <p:nvGrpSpPr>
@@ -10323,14 +9633,7 @@
         <p:cNvGrpSpPr/>
         <p:nvPr/>
       </p:nvGrpSpPr>
-      <p:grpSpPr>
-        <a:xfrm>
-          <a:off x="0" y="0"/>
-          <a:ext cx="0" cy="0"/>
-          <a:chOff x="0" y="0"/>
-          <a:chExt cx="0" cy="0"/>
-        </a:xfrm>
-      </p:grpSpPr>
+      <p:grpSpPr/>
       <p:sp>
         <p:nvSpPr>
           <p:cNvPr id="2" name="Title 1"/>
@@ -10348,7 +9651,6 @@
           <a:p>
             <a:pPr algn="l"/>
             <a:r>
-              <a:rPr dirty="0"/>
               <a:t>Activated File Types</a:t>
             </a:r>
           </a:p>
@@ -10367,13 +9669,11 @@
         <p:spPr>
           <a:xfrm>
             <a:off x="457200" y="1508760"/>
-            <a:ext cx="11247120" cy="1191910"/>
+            <a:ext cx="11247120" cy="2907792"/>
           </a:xfrm>
         </p:spPr>
         <p:txBody>
-          <a:bodyPr wrap="square" lIns="109728" tIns="91440" rIns="109728" bIns="91440">
-            <a:normAutofit/>
-          </a:bodyPr>
+          <a:bodyPr wrap="square" lIns="109728" rIns="109728" tIns="91440" bIns="91440"/>
           <a:lstStyle/>
           <a:p>
             <a:pPr>
@@ -10385,76 +9685,13 @@
               </a:spcAft>
             </a:pPr>
             <a:r>
-              <a:rPr lang="en-US" dirty="0">
+              <a:rPr sz="1500" b="0" i="0">
                 <a:solidFill>
                   <a:srgbClr val="1A1A2E"/>
                 </a:solidFill>
                 <a:latin typeface="Calibri"/>
               </a:rPr>
-              <a:t>IBM-CLLE </a:t>
-            </a:r>
-            <a:r>
-              <a:rPr lang="en-US" b="0" i="0" dirty="0">
-                <a:solidFill>
-                  <a:srgbClr val="1A1A2E"/>
-                </a:solidFill>
-                <a:latin typeface="Calibri"/>
-              </a:rPr>
-              <a:t>and </a:t>
-            </a:r>
-            <a:r>
-              <a:rPr lang="en-US" dirty="0">
-                <a:solidFill>
-                  <a:srgbClr val="1A1A2E"/>
-                </a:solidFill>
-                <a:latin typeface="Calibri"/>
-              </a:rPr>
-              <a:t>My CLPROMPTER extensions </a:t>
-            </a:r>
-            <a:r>
-              <a:rPr b="0" i="0" dirty="0">
-                <a:solidFill>
-                  <a:srgbClr val="1A1A2E"/>
-                </a:solidFill>
-                <a:latin typeface="Calibri"/>
-              </a:rPr>
-              <a:t>activate</a:t>
-            </a:r>
-            <a:r>
-              <a:rPr lang="en-US" b="0" i="0" dirty="0">
-                <a:solidFill>
-                  <a:srgbClr val="1A1A2E"/>
-                </a:solidFill>
-                <a:latin typeface="Calibri"/>
-              </a:rPr>
-              <a:t> </a:t>
-            </a:r>
-            <a:r>
-              <a:rPr b="0" i="0" dirty="0">
-                <a:solidFill>
-                  <a:srgbClr val="1A1A2E"/>
-                </a:solidFill>
-                <a:latin typeface="Calibri"/>
-              </a:rPr>
-              <a:t>automatically </a:t>
-            </a:r>
-            <a:r>
-              <a:rPr lang="en-US" b="0" i="0" dirty="0">
-                <a:solidFill>
-                  <a:srgbClr val="1A1A2E"/>
-                </a:solidFill>
-                <a:latin typeface="Calibri"/>
-              </a:rPr>
-              <a:t>(when installed) </a:t>
-            </a:r>
-            <a:r>
-              <a:rPr b="0" i="0" dirty="0">
-                <a:solidFill>
-                  <a:srgbClr val="1A1A2E"/>
-                </a:solidFill>
-                <a:latin typeface="Calibri"/>
-              </a:rPr>
-              <a:t>for these source types:</a:t>
+              <a:t>The extension activates automatically for these source types:</a:t>
             </a:r>
           </a:p>
         </p:txBody>
@@ -10465,17 +9702,11 @@
           <p:cNvGraphicFramePr>
             <a:graphicFrameLocks noGrp="1"/>
           </p:cNvGraphicFramePr>
-          <p:nvPr>
-            <p:extLst>
-              <p:ext uri="{D42A27DB-BD31-4B8C-83A1-F6EECF244321}">
-                <p14:modId xmlns:p14="http://schemas.microsoft.com/office/powerpoint/2010/main" val="1391809237"/>
-              </p:ext>
-            </p:extLst>
-          </p:nvPr>
+          <p:nvPr/>
         </p:nvGraphicFramePr>
         <p:xfrm>
-          <a:off x="1871330" y="2294739"/>
-          <a:ext cx="7549116" cy="2581161"/>
+          <a:off x="457200" y="4507992"/>
+          <a:ext cx="11247120" cy="1609344"/>
         </p:xfrm>
         <a:graphic>
           <a:graphicData uri="http://schemas.openxmlformats.org/drawingml/2006/table">
@@ -10484,29 +9715,17 @@
                 <a:tableStyleId>{5C22544A-7EE6-4342-B048-85BDC9FD1C3A}</a:tableStyleId>
               </a:tblPr>
               <a:tblGrid>
-                <a:gridCol w="1120449">
-                  <a:extLst>
-                    <a:ext uri="{9D8B030D-6E8A-4147-A177-3AD203B41FA5}">
-                      <a16:colId xmlns:a16="http://schemas.microsoft.com/office/drawing/2014/main" val="20000"/>
-                    </a:ext>
-                  </a:extLst>
-                </a:gridCol>
-                <a:gridCol w="6428667">
-                  <a:extLst>
-                    <a:ext uri="{9D8B030D-6E8A-4147-A177-3AD203B41FA5}">
-                      <a16:colId xmlns:a16="http://schemas.microsoft.com/office/drawing/2014/main" val="20001"/>
-                    </a:ext>
-                  </a:extLst>
-                </a:gridCol>
+                <a:gridCol w="5623560"/>
+                <a:gridCol w="5623560"/>
               </a:tblGrid>
-              <a:tr h="1000450">
+              <a:tr h="402336">
                 <a:tc>
                   <a:txBody>
-                    <a:bodyPr/>
+                    <a:bodyPr wrap="square"/>
                     <a:lstStyle/>
                     <a:p>
                       <a:r>
-                        <a:rPr sz="1800" b="1" dirty="0">
+                        <a:rPr sz="1200" b="1">
                           <a:solidFill>
                             <a:srgbClr val="FFFFFF"/>
                           </a:solidFill>
@@ -10516,7 +9735,7 @@
                       </a:r>
                     </a:p>
                   </a:txBody>
-                  <a:tcPr anchor="ctr">
+                  <a:tcPr>
                     <a:solidFill>
                       <a:srgbClr val="1F497D"/>
                     </a:solidFill>
@@ -10524,11 +9743,11 @@
                 </a:tc>
                 <a:tc>
                   <a:txBody>
-                    <a:bodyPr/>
+                    <a:bodyPr wrap="square"/>
                     <a:lstStyle/>
                     <a:p>
                       <a:r>
-                        <a:rPr sz="1800" b="1" dirty="0">
+                        <a:rPr sz="1200" b="1">
                           <a:solidFill>
                             <a:srgbClr val="FFFFFF"/>
                           </a:solidFill>
@@ -10538,26 +9757,21 @@
                       </a:r>
                     </a:p>
                   </a:txBody>
-                  <a:tcPr anchor="ctr">
+                  <a:tcPr>
                     <a:solidFill>
                       <a:srgbClr val="1F497D"/>
                     </a:solidFill>
                   </a:tcPr>
                 </a:tc>
-                <a:extLst>
-                  <a:ext uri="{0D108BD9-81ED-4DB2-BD59-A6C34878D82A}">
-                    <a16:rowId xmlns:a16="http://schemas.microsoft.com/office/drawing/2014/main" val="10000"/>
-                  </a:ext>
-                </a:extLst>
               </a:tr>
-              <a:tr h="700315">
+              <a:tr h="402336">
                 <a:tc>
                   <a:txBody>
-                    <a:bodyPr/>
+                    <a:bodyPr wrap="square"/>
                     <a:lstStyle/>
                     <a:p>
                       <a:r>
-                        <a:rPr sz="1800">
+                        <a:rPr sz="1200">
                           <a:solidFill>
                             <a:srgbClr val="1A1A2E"/>
                           </a:solidFill>
@@ -10567,15 +9781,15 @@
                       </a:r>
                     </a:p>
                   </a:txBody>
-                  <a:tcPr anchor="ctr"/>
+                  <a:tcPr/>
                 </a:tc>
                 <a:tc>
                   <a:txBody>
-                    <a:bodyPr/>
+                    <a:bodyPr wrap="square"/>
                     <a:lstStyle/>
                     <a:p>
                       <a:r>
-                        <a:rPr sz="1800">
+                        <a:rPr sz="1200">
                           <a:solidFill>
                             <a:srgbClr val="1A1A2E"/>
                           </a:solidFill>
@@ -10585,22 +9799,17 @@
                       </a:r>
                     </a:p>
                   </a:txBody>
-                  <a:tcPr anchor="ctr"/>
+                  <a:tcPr/>
                 </a:tc>
-                <a:extLst>
-                  <a:ext uri="{0D108BD9-81ED-4DB2-BD59-A6C34878D82A}">
-                    <a16:rowId xmlns:a16="http://schemas.microsoft.com/office/drawing/2014/main" val="10001"/>
-                  </a:ext>
-                </a:extLst>
               </a:tr>
-              <a:tr h="440198">
+              <a:tr h="402336">
                 <a:tc>
                   <a:txBody>
-                    <a:bodyPr/>
+                    <a:bodyPr wrap="square"/>
                     <a:lstStyle/>
                     <a:p>
                       <a:r>
-                        <a:rPr sz="1800">
+                        <a:rPr sz="1200">
                           <a:solidFill>
                             <a:srgbClr val="1A1A2E"/>
                           </a:solidFill>
@@ -10610,7 +9819,7 @@
                       </a:r>
                     </a:p>
                   </a:txBody>
-                  <a:tcPr anchor="ctr">
+                  <a:tcPr>
                     <a:solidFill>
                       <a:srgbClr val="EAF0FA"/>
                     </a:solidFill>
@@ -10618,11 +9827,11 @@
                 </a:tc>
                 <a:tc>
                   <a:txBody>
-                    <a:bodyPr/>
+                    <a:bodyPr wrap="square"/>
                     <a:lstStyle/>
                     <a:p>
                       <a:r>
-                        <a:rPr sz="1800" dirty="0">
+                        <a:rPr sz="1200">
                           <a:solidFill>
                             <a:srgbClr val="1A1A2E"/>
                           </a:solidFill>
@@ -10632,26 +9841,21 @@
                       </a:r>
                     </a:p>
                   </a:txBody>
-                  <a:tcPr anchor="ctr">
+                  <a:tcPr>
                     <a:solidFill>
                       <a:srgbClr val="EAF0FA"/>
                     </a:solidFill>
                   </a:tcPr>
                 </a:tc>
-                <a:extLst>
-                  <a:ext uri="{0D108BD9-81ED-4DB2-BD59-A6C34878D82A}">
-                    <a16:rowId xmlns:a16="http://schemas.microsoft.com/office/drawing/2014/main" val="10002"/>
-                  </a:ext>
-                </a:extLst>
               </a:tr>
-              <a:tr h="440198">
+              <a:tr h="402336">
                 <a:tc>
                   <a:txBody>
-                    <a:bodyPr/>
+                    <a:bodyPr wrap="square"/>
                     <a:lstStyle/>
                     <a:p>
                       <a:r>
-                        <a:rPr sz="1800">
+                        <a:rPr sz="1200">
                           <a:solidFill>
                             <a:srgbClr val="1A1A2E"/>
                           </a:solidFill>
@@ -10661,15 +9865,15 @@
                       </a:r>
                     </a:p>
                   </a:txBody>
-                  <a:tcPr anchor="ctr"/>
+                  <a:tcPr/>
                 </a:tc>
                 <a:tc>
                   <a:txBody>
-                    <a:bodyPr/>
+                    <a:bodyPr wrap="square"/>
                     <a:lstStyle/>
                     <a:p>
                       <a:r>
-                        <a:rPr sz="1800" dirty="0">
+                        <a:rPr sz="1200">
                           <a:solidFill>
                             <a:srgbClr val="1A1A2E"/>
                           </a:solidFill>
@@ -10679,13 +9883,8 @@
                       </a:r>
                     </a:p>
                   </a:txBody>
-                  <a:tcPr anchor="ctr"/>
+                  <a:tcPr/>
                 </a:tc>
-                <a:extLst>
-                  <a:ext uri="{0D108BD9-81ED-4DB2-BD59-A6C34878D82A}">
-                    <a16:rowId xmlns:a16="http://schemas.microsoft.com/office/drawing/2014/main" val="10003"/>
-                  </a:ext>
-                </a:extLst>
               </a:tr>
             </a:tbl>
           </a:graphicData>
@@ -10699,8 +9898,8 @@
         </p:nvSpPr>
         <p:spPr>
           <a:xfrm>
-            <a:off x="1871330" y="6245352"/>
-            <a:ext cx="8644270" cy="307777"/>
+            <a:off x="457200" y="6245352"/>
+            <a:ext cx="11247120" cy="329184"/>
           </a:xfrm>
           <a:prstGeom prst="rect">
             <a:avLst/>
@@ -10714,7 +9913,7 @@
           <a:lstStyle/>
           <a:p>
             <a:r>
-              <a:rPr sz="1400" b="0" i="0" dirty="0">
+              <a:rPr sz="1400" b="0" i="0">
                 <a:solidFill>
                   <a:srgbClr val="1A1A2E"/>
                 </a:solidFill>
@@ -10734,7 +9933,7 @@
 </file>
 
 <file path=ppt/slides/slide5.xml><?xml version="1.0" encoding="utf-8"?>
-<p:sld xmlns:a="http://schemas.openxmlformats.org/drawingml/2006/main" xmlns:r="http://schemas.openxmlformats.org/officeDocument/2006/relationships" xmlns:p="http://schemas.openxmlformats.org/presentationml/2006/main">
+<p:sld xmlns:a="http://schemas.openxmlformats.org/drawingml/2006/main" xmlns:p="http://schemas.openxmlformats.org/presentationml/2006/main" xmlns:r="http://schemas.openxmlformats.org/officeDocument/2006/relationships">
   <p:cSld>
     <p:spTree>
       <p:nvGrpSpPr>
@@ -10742,14 +9941,7 @@
         <p:cNvGrpSpPr/>
         <p:nvPr/>
       </p:nvGrpSpPr>
-      <p:grpSpPr>
-        <a:xfrm>
-          <a:off x="0" y="0"/>
-          <a:ext cx="0" cy="0"/>
-          <a:chOff x="0" y="0"/>
-          <a:chExt cx="0" cy="0"/>
-        </a:xfrm>
-      </p:grpSpPr>
+      <p:grpSpPr/>
       <p:sp>
         <p:nvSpPr>
           <p:cNvPr id="2" name="Title 1"/>
@@ -10789,9 +9981,7 @@
           </a:xfrm>
         </p:spPr>
         <p:txBody>
-          <a:bodyPr wrap="square" lIns="109728" tIns="91440" rIns="109728" bIns="91440">
-            <a:normAutofit/>
-          </a:bodyPr>
+          <a:bodyPr wrap="square" lIns="109728" rIns="109728" tIns="91440" bIns="91440"/>
           <a:lstStyle/>
           <a:p>
             <a:pPr>
@@ -10803,7 +9993,7 @@
               </a:spcAft>
             </a:pPr>
             <a:r>
-              <a:rPr sz="2400" b="0" i="0" dirty="0">
+              <a:rPr sz="1500" b="0" i="0">
                 <a:solidFill>
                   <a:srgbClr val="1A1A2E"/>
                 </a:solidFill>
@@ -10812,7 +10002,7 @@
               <a:t>The VS Code </a:t>
             </a:r>
             <a:r>
-              <a:rPr sz="2400" b="1" i="0" dirty="0">
+              <a:rPr sz="1500" b="1" i="0">
                 <a:solidFill>
                   <a:srgbClr val="1F497D"/>
                 </a:solidFill>
@@ -10821,7 +10011,7 @@
               <a:t>Outline</a:t>
             </a:r>
             <a:r>
-              <a:rPr sz="2400" b="0" i="0" dirty="0">
+              <a:rPr sz="1500" b="0" i="0">
                 <a:solidFill>
                   <a:srgbClr val="1A1A2E"/>
                 </a:solidFill>
@@ -10840,7 +10030,7 @@
               </a:spcAft>
             </a:pPr>
             <a:r>
-              <a:rPr sz="2400" b="0" i="0" dirty="0">
+              <a:rPr sz="1500" b="0" i="0">
                 <a:solidFill>
                   <a:srgbClr val="1A1A2E"/>
                 </a:solidFill>
@@ -10859,7 +10049,7 @@
               </a:spcAft>
             </a:pPr>
             <a:r>
-              <a:rPr sz="2400" b="0" i="0" dirty="0">
+              <a:rPr sz="1500" b="0" i="0">
                 <a:solidFill>
                   <a:srgbClr val="1A1A2E"/>
                 </a:solidFill>
@@ -10868,7 +10058,7 @@
               <a:t>Works with the standard VS Code </a:t>
             </a:r>
             <a:r>
-              <a:rPr sz="2400" b="1" i="0" dirty="0">
+              <a:rPr sz="1500" b="1" i="0">
                 <a:solidFill>
                   <a:srgbClr val="1F497D"/>
                 </a:solidFill>
@@ -10877,7 +10067,7 @@
               <a:t>Breadcrumb</a:t>
             </a:r>
             <a:r>
-              <a:rPr sz="2400" b="0" i="0" dirty="0">
+              <a:rPr sz="1500" b="0" i="0">
                 <a:solidFill>
                   <a:srgbClr val="1A1A2E"/>
                 </a:solidFill>
@@ -10896,7 +10086,7 @@
               </a:spcAft>
             </a:pPr>
             <a:r>
-              <a:rPr sz="2400" b="0" i="0" dirty="0">
+              <a:rPr sz="1500" b="0" i="0">
                 <a:solidFill>
                   <a:srgbClr val="1A1A2E"/>
                 </a:solidFill>
@@ -10915,7 +10105,7 @@
               </a:spcAft>
             </a:pPr>
             <a:r>
-              <a:rPr sz="2400" b="0" i="0" dirty="0">
+              <a:rPr sz="1500" b="0" i="0">
                 <a:solidFill>
                   <a:srgbClr val="1A1A2E"/>
                 </a:solidFill>
@@ -10935,7 +10125,7 @@
 </file>
 
 <file path=ppt/slides/slide6.xml><?xml version="1.0" encoding="utf-8"?>
-<p:sld xmlns:a="http://schemas.openxmlformats.org/drawingml/2006/main" xmlns:r="http://schemas.openxmlformats.org/officeDocument/2006/relationships" xmlns:p="http://schemas.openxmlformats.org/presentationml/2006/main">
+<p:sld xmlns:a="http://schemas.openxmlformats.org/drawingml/2006/main" xmlns:p="http://schemas.openxmlformats.org/presentationml/2006/main" xmlns:r="http://schemas.openxmlformats.org/officeDocument/2006/relationships">
   <p:cSld>
     <p:spTree>
       <p:nvGrpSpPr>
@@ -10943,14 +10133,7 @@
         <p:cNvGrpSpPr/>
         <p:nvPr/>
       </p:nvGrpSpPr>
-      <p:grpSpPr>
-        <a:xfrm>
-          <a:off x="0" y="0"/>
-          <a:ext cx="0" cy="0"/>
-          <a:chOff x="0" y="0"/>
-          <a:chExt cx="0" cy="0"/>
-        </a:xfrm>
-      </p:grpSpPr>
+      <p:grpSpPr/>
       <p:sp>
         <p:nvSpPr>
           <p:cNvPr id="2" name="Title 1"/>
@@ -10990,9 +10173,7 @@
           </a:xfrm>
         </p:spPr>
         <p:txBody>
-          <a:bodyPr wrap="square" lIns="109728" tIns="91440" rIns="109728" bIns="91440">
-            <a:normAutofit/>
-          </a:bodyPr>
+          <a:bodyPr wrap="square" lIns="109728" rIns="109728" tIns="91440" bIns="91440"/>
           <a:lstStyle/>
           <a:p>
             <a:pPr>
@@ -11004,7 +10185,7 @@
               </a:spcAft>
             </a:pPr>
             <a:r>
-              <a:rPr sz="2400" b="0" i="0" dirty="0">
+              <a:rPr sz="1500" b="0" i="0">
                 <a:solidFill>
                   <a:srgbClr val="1A1A2E"/>
                 </a:solidFill>
@@ -11013,7 +10194,7 @@
               <a:t>Press </a:t>
             </a:r>
             <a:r>
-              <a:rPr sz="2400" b="1" i="0" dirty="0" err="1">
+              <a:rPr sz="1500" b="1" i="0">
                 <a:solidFill>
                   <a:srgbClr val="1F497D"/>
                 </a:solidFill>
@@ -11022,7 +10203,7 @@
               <a:t>Ctrl+Space</a:t>
             </a:r>
             <a:r>
-              <a:rPr sz="2400" b="0" i="0" dirty="0">
+              <a:rPr sz="1500" b="0" i="0">
                 <a:solidFill>
                   <a:srgbClr val="1A1A2E"/>
                 </a:solidFill>
@@ -11031,7 +10212,7 @@
               <a:t> to trigger auto-complete anywhere in a </a:t>
             </a:r>
             <a:r>
-              <a:rPr sz="2400" b="0" i="0" dirty="0">
+              <a:rPr sz="1300" b="0" i="0">
                 <a:solidFill>
                   <a:srgbClr val="B5204F"/>
                 </a:solidFill>
@@ -11040,7 +10221,7 @@
               <a:t>.cl</a:t>
             </a:r>
             <a:r>
-              <a:rPr sz="2400" b="0" i="0" dirty="0">
+              <a:rPr sz="1500" b="0" i="0">
                 <a:solidFill>
                   <a:srgbClr val="1A1A2E"/>
                 </a:solidFill>
@@ -11059,7 +10240,7 @@
               </a:spcAft>
             </a:pPr>
             <a:r>
-              <a:rPr sz="2400" b="0" i="0" dirty="0">
+              <a:rPr sz="1500" b="0" i="0">
                 <a:solidFill>
                   <a:srgbClr val="1A1A2E"/>
                 </a:solidFill>
@@ -11078,7 +10259,7 @@
               </a:spcAft>
             </a:pPr>
             <a:r>
-              <a:rPr sz="2400" b="1" i="0" dirty="0">
+              <a:rPr sz="1500" b="1" i="0">
                 <a:solidFill>
                   <a:srgbClr val="1F497D"/>
                 </a:solidFill>
@@ -11087,7 +10268,7 @@
               <a:t>Parameter completion</a:t>
             </a:r>
             <a:r>
-              <a:rPr sz="2400" b="0" i="0" dirty="0">
+              <a:rPr sz="1500" b="0" i="0">
                 <a:solidFill>
                   <a:srgbClr val="1A1A2E"/>
                 </a:solidFill>
@@ -11106,31 +10287,13 @@
               </a:spcAft>
             </a:pPr>
             <a:r>
-              <a:rPr sz="2400" b="0" i="0" dirty="0">
+              <a:rPr sz="1500" b="0" i="0">
                 <a:solidFill>
                   <a:srgbClr val="1A1A2E"/>
                 </a:solidFill>
                 <a:latin typeface="Calibri"/>
               </a:rPr>
-              <a:t>Keyword descriptions come from IBM </a:t>
-            </a:r>
-            <a:r>
-              <a:rPr sz="2400" b="0" i="0" dirty="0" err="1">
-                <a:solidFill>
-                  <a:srgbClr val="1A1A2E"/>
-                </a:solidFill>
-                <a:latin typeface="Calibri"/>
-              </a:rPr>
-              <a:t>i</a:t>
-            </a:r>
-            <a:r>
-              <a:rPr sz="2400" b="0" i="0" dirty="0">
-                <a:solidFill>
-                  <a:srgbClr val="1A1A2E"/>
-                </a:solidFill>
-                <a:latin typeface="Calibri"/>
-              </a:rPr>
-              <a:t> command definitions</a:t>
+              <a:t>Keyword descriptions come from IBM i command definitions</a:t>
             </a:r>
           </a:p>
           <a:p>
@@ -11143,7 +10306,7 @@
               </a:spcAft>
             </a:pPr>
             <a:r>
-              <a:rPr sz="2400" b="0" i="0" dirty="0">
+              <a:rPr sz="1500" b="0" i="0">
                 <a:solidFill>
                   <a:srgbClr val="1A1A2E"/>
                 </a:solidFill>
@@ -11152,49 +10315,22 @@
               <a:t>Requires a live connection via </a:t>
             </a:r>
             <a:r>
-              <a:rPr sz="2400" b="1" i="0" dirty="0">
+              <a:rPr sz="1500" b="1" i="0">
                 <a:solidFill>
                   <a:srgbClr val="1F497D"/>
                 </a:solidFill>
                 <a:latin typeface="Calibri"/>
               </a:rPr>
-              <a:t>Code for IBM </a:t>
-            </a:r>
-            <a:r>
-              <a:rPr sz="2400" b="1" i="0" dirty="0" err="1">
-                <a:solidFill>
-                  <a:srgbClr val="1F497D"/>
-                </a:solidFill>
-                <a:latin typeface="Calibri"/>
-              </a:rPr>
-              <a:t>i</a:t>
-            </a:r>
-            <a:r>
-              <a:rPr sz="2400" b="0" i="0" dirty="0">
+              <a:t>Code for IBM i</a:t>
+            </a:r>
+            <a:r>
+              <a:rPr sz="1500" b="0" i="0">
                 <a:solidFill>
                   <a:srgbClr val="1A1A2E"/>
                 </a:solidFill>
                 <a:latin typeface="Calibri"/>
               </a:rPr>
-              <a:t> for full IBM </a:t>
-            </a:r>
-            <a:r>
-              <a:rPr sz="2400" b="0" i="0" dirty="0" err="1">
-                <a:solidFill>
-                  <a:srgbClr val="1A1A2E"/>
-                </a:solidFill>
-                <a:latin typeface="Calibri"/>
-              </a:rPr>
-              <a:t>i</a:t>
-            </a:r>
-            <a:r>
-              <a:rPr sz="2400" b="0" i="0" dirty="0">
-                <a:solidFill>
-                  <a:srgbClr val="1A1A2E"/>
-                </a:solidFill>
-                <a:latin typeface="Calibri"/>
-              </a:rPr>
-              <a:t> command catalog</a:t>
+              <a:t> for full IBM i command catalog</a:t>
             </a:r>
           </a:p>
         </p:txBody>
@@ -11208,7 +10344,7 @@
 </file>
 
 <file path=ppt/slides/slide7.xml><?xml version="1.0" encoding="utf-8"?>
-<p:sld xmlns:a="http://schemas.openxmlformats.org/drawingml/2006/main" xmlns:r="http://schemas.openxmlformats.org/officeDocument/2006/relationships" xmlns:p="http://schemas.openxmlformats.org/presentationml/2006/main">
+<p:sld xmlns:a="http://schemas.openxmlformats.org/drawingml/2006/main" xmlns:p="http://schemas.openxmlformats.org/presentationml/2006/main" xmlns:r="http://schemas.openxmlformats.org/officeDocument/2006/relationships">
   <p:cSld>
     <p:spTree>
       <p:nvGrpSpPr>
@@ -11216,14 +10352,7 @@
         <p:cNvGrpSpPr/>
         <p:nvPr/>
       </p:nvGrpSpPr>
-      <p:grpSpPr>
-        <a:xfrm>
-          <a:off x="0" y="0"/>
-          <a:ext cx="0" cy="0"/>
-          <a:chOff x="0" y="0"/>
-          <a:chExt cx="0" cy="0"/>
-        </a:xfrm>
-      </p:grpSpPr>
+      <p:grpSpPr/>
       <p:sp>
         <p:nvSpPr>
           <p:cNvPr id="2" name="Title 1"/>
@@ -11263,9 +10392,7 @@
           </a:xfrm>
         </p:spPr>
         <p:txBody>
-          <a:bodyPr wrap="square" lIns="109728" tIns="91440" rIns="109728" bIns="91440">
-            <a:normAutofit/>
-          </a:bodyPr>
+          <a:bodyPr wrap="square" lIns="109728" rIns="109728" tIns="91440" bIns="91440"/>
           <a:lstStyle/>
           <a:p>
             <a:pPr>
@@ -11277,7 +10404,7 @@
               </a:spcAft>
             </a:pPr>
             <a:r>
-              <a:rPr sz="2400" b="1" i="0" dirty="0">
+              <a:rPr sz="1500" b="1" i="0">
                 <a:solidFill>
                   <a:srgbClr val="1F497D"/>
                 </a:solidFill>
@@ -11286,31 +10413,13 @@
               <a:t>Go to Definition</a:t>
             </a:r>
             <a:r>
-              <a:rPr sz="2400" b="0" i="0" dirty="0">
+              <a:rPr sz="1500" b="0" i="0">
                 <a:solidFill>
                   <a:srgbClr val="1A1A2E"/>
                 </a:solidFill>
                 <a:latin typeface="Calibri"/>
               </a:rPr>
-              <a:t> (F12 or </a:t>
-            </a:r>
-            <a:r>
-              <a:rPr sz="2400" b="0" i="0" dirty="0" err="1">
-                <a:solidFill>
-                  <a:srgbClr val="1A1A2E"/>
-                </a:solidFill>
-                <a:latin typeface="Calibri"/>
-              </a:rPr>
-              <a:t>Ctrl+Click</a:t>
-            </a:r>
-            <a:r>
-              <a:rPr sz="2400" b="0" i="0" dirty="0">
-                <a:solidFill>
-                  <a:srgbClr val="1A1A2E"/>
-                </a:solidFill>
-                <a:latin typeface="Calibri"/>
-              </a:rPr>
-              <a:t>):</a:t>
+              <a:t> (F12 or Ctrl+Click):</a:t>
             </a:r>
           </a:p>
           <a:p>
@@ -11323,7 +10432,7 @@
               </a:spcAft>
             </a:pPr>
             <a:r>
-              <a:rPr sz="2400" b="0" i="0" dirty="0">
+              <a:rPr sz="1500" b="0" i="0">
                 <a:solidFill>
                   <a:srgbClr val="1A1A2E"/>
                 </a:solidFill>
@@ -11332,7 +10441,7 @@
               <a:t>Jump to where a </a:t>
             </a:r>
             <a:r>
-              <a:rPr sz="2400" b="0" i="0" dirty="0">
+              <a:rPr sz="1300" b="0" i="0">
                 <a:solidFill>
                   <a:srgbClr val="B5204F"/>
                 </a:solidFill>
@@ -11341,7 +10450,7 @@
               <a:t>DCL</a:t>
             </a:r>
             <a:r>
-              <a:rPr sz="2400" b="0" i="0" dirty="0">
+              <a:rPr sz="1500" b="0" i="0">
                 <a:solidFill>
                   <a:srgbClr val="1A1A2E"/>
                 </a:solidFill>
@@ -11350,7 +10459,7 @@
               <a:t> variable, </a:t>
             </a:r>
             <a:r>
-              <a:rPr sz="2400" b="0" i="0" dirty="0">
+              <a:rPr sz="1300" b="0" i="0">
                 <a:solidFill>
                   <a:srgbClr val="B5204F"/>
                 </a:solidFill>
@@ -11359,7 +10468,7 @@
               <a:t>DCLF</a:t>
             </a:r>
             <a:r>
-              <a:rPr sz="2400" b="0" i="0" dirty="0">
+              <a:rPr sz="1500" b="0" i="0">
                 <a:solidFill>
                   <a:srgbClr val="1A1A2E"/>
                 </a:solidFill>
@@ -11378,7 +10487,7 @@
               </a:spcAft>
             </a:pPr>
             <a:r>
-              <a:rPr sz="2400" b="0" i="0" dirty="0">
+              <a:rPr sz="1500" b="0" i="0">
                 <a:solidFill>
                   <a:srgbClr val="1A1A2E"/>
                 </a:solidFill>
@@ -11397,7 +10506,7 @@
               </a:spcAft>
             </a:pPr>
             <a:r>
-              <a:rPr sz="2400" b="1" i="0" dirty="0">
+              <a:rPr sz="1500" b="1" i="0">
                 <a:solidFill>
                   <a:srgbClr val="1F497D"/>
                 </a:solidFill>
@@ -11406,7 +10515,7 @@
               <a:t>Find All References</a:t>
             </a:r>
             <a:r>
-              <a:rPr sz="2400" b="0" i="0" dirty="0">
+              <a:rPr sz="1500" b="0" i="0">
                 <a:solidFill>
                   <a:srgbClr val="1A1A2E"/>
                 </a:solidFill>
@@ -11425,7 +10534,7 @@
               </a:spcAft>
             </a:pPr>
             <a:r>
-              <a:rPr sz="2400" b="0" i="0" dirty="0">
+              <a:rPr sz="1500" b="0" i="0">
                 <a:solidFill>
                   <a:srgbClr val="1A1A2E"/>
                 </a:solidFill>
@@ -11444,7 +10553,7 @@
               </a:spcAft>
             </a:pPr>
             <a:r>
-              <a:rPr sz="2400" b="0" i="0" dirty="0">
+              <a:rPr sz="1500" b="0" i="0">
                 <a:solidFill>
                   <a:srgbClr val="1A1A2E"/>
                 </a:solidFill>
@@ -11463,7 +10572,7 @@
               </a:spcAft>
             </a:pPr>
             <a:r>
-              <a:rPr sz="2400" b="1" i="0" dirty="0">
+              <a:rPr sz="1500" b="1" i="0">
                 <a:solidFill>
                   <a:srgbClr val="1F497D"/>
                 </a:solidFill>
@@ -11472,7 +10581,7 @@
               <a:t>Peek Definition</a:t>
             </a:r>
             <a:r>
-              <a:rPr sz="2400" b="0" i="0" dirty="0">
+              <a:rPr sz="1500" b="0" i="0">
                 <a:solidFill>
                   <a:srgbClr val="1A1A2E"/>
                 </a:solidFill>
@@ -11491,7 +10600,7 @@
               </a:spcAft>
             </a:pPr>
             <a:r>
-              <a:rPr sz="2400" b="0" i="0" dirty="0">
+              <a:rPr sz="1500" b="0" i="0">
                 <a:solidFill>
                   <a:srgbClr val="1A1A2E"/>
                 </a:solidFill>
@@ -11511,7 +10620,7 @@
 </file>
 
 <file path=ppt/slides/slide8.xml><?xml version="1.0" encoding="utf-8"?>
-<p:sld xmlns:a="http://schemas.openxmlformats.org/drawingml/2006/main" xmlns:r="http://schemas.openxmlformats.org/officeDocument/2006/relationships" xmlns:p="http://schemas.openxmlformats.org/presentationml/2006/main">
+<p:sld xmlns:a="http://schemas.openxmlformats.org/drawingml/2006/main" xmlns:p="http://schemas.openxmlformats.org/presentationml/2006/main" xmlns:r="http://schemas.openxmlformats.org/officeDocument/2006/relationships">
   <p:cSld>
     <p:spTree>
       <p:nvGrpSpPr>
@@ -11519,14 +10628,7 @@
         <p:cNvGrpSpPr/>
         <p:nvPr/>
       </p:nvGrpSpPr>
-      <p:grpSpPr>
-        <a:xfrm>
-          <a:off x="0" y="0"/>
-          <a:ext cx="0" cy="0"/>
-          <a:chOff x="0" y="0"/>
-          <a:chExt cx="0" cy="0"/>
-        </a:xfrm>
-      </p:grpSpPr>
+      <p:grpSpPr/>
       <p:sp>
         <p:nvSpPr>
           <p:cNvPr id="2" name="Title 1"/>
@@ -11566,9 +10668,7 @@
           </a:xfrm>
         </p:spPr>
         <p:txBody>
-          <a:bodyPr wrap="square" lIns="109728" tIns="91440" rIns="109728" bIns="91440">
-            <a:normAutofit/>
-          </a:bodyPr>
+          <a:bodyPr wrap="square" lIns="109728" rIns="109728" tIns="91440" bIns="91440"/>
           <a:lstStyle/>
           <a:p>
             <a:pPr>
@@ -11580,7 +10680,7 @@
               </a:spcAft>
             </a:pPr>
             <a:r>
-              <a:rPr sz="2400" b="0" i="0" dirty="0">
+              <a:rPr sz="1500" b="0" i="0">
                 <a:solidFill>
                   <a:srgbClr val="1A1A2E"/>
                 </a:solidFill>
@@ -11589,7 +10689,7 @@
               <a:t>Hover your cursor over a </a:t>
             </a:r>
             <a:r>
-              <a:rPr sz="2400" b="1" i="0" dirty="0">
+              <a:rPr sz="1500" b="1" i="0">
                 <a:solidFill>
                   <a:srgbClr val="1F497D"/>
                 </a:solidFill>
@@ -11598,7 +10698,7 @@
               <a:t>CL command name</a:t>
             </a:r>
             <a:r>
-              <a:rPr sz="2400" b="0" i="0" dirty="0">
+              <a:rPr sz="1500" b="0" i="0">
                 <a:solidFill>
                   <a:srgbClr val="1A1A2E"/>
                 </a:solidFill>
@@ -11617,7 +10717,7 @@
               </a:spcAft>
             </a:pPr>
             <a:r>
-              <a:rPr sz="2400" b="0" i="0" dirty="0">
+              <a:rPr sz="1500" b="0" i="0">
                 <a:solidFill>
                   <a:srgbClr val="1A1A2E"/>
                 </a:solidFill>
@@ -11626,7 +10726,7 @@
               <a:t>Hover over a </a:t>
             </a:r>
             <a:r>
-              <a:rPr sz="2400" b="1" i="0" dirty="0">
+              <a:rPr sz="1500" b="1" i="0">
                 <a:solidFill>
                   <a:srgbClr val="1F497D"/>
                 </a:solidFill>
@@ -11635,7 +10735,7 @@
               <a:t>parameter keyword</a:t>
             </a:r>
             <a:r>
-              <a:rPr sz="2400" b="0" i="0" dirty="0">
+              <a:rPr sz="1500" b="0" i="0">
                 <a:solidFill>
                   <a:srgbClr val="1A1A2E"/>
                 </a:solidFill>
@@ -11654,56 +10754,23 @@
               </a:spcAft>
             </a:pPr>
             <a:r>
-              <a:rPr sz="2400" b="0" i="0" dirty="0">
+              <a:rPr sz="1500" b="0" i="0">
                 <a:solidFill>
                   <a:srgbClr val="1A1A2E"/>
                 </a:solidFill>
                 <a:latin typeface="Calibri"/>
               </a:rPr>
-              <a:t>Documentation is fetched live from the IBM </a:t>
-            </a:r>
-            <a:r>
-              <a:rPr sz="2400" b="0" i="0" dirty="0" err="1">
-                <a:solidFill>
-                  <a:srgbClr val="1A1A2E"/>
-                </a:solidFill>
-                <a:latin typeface="Calibri"/>
-              </a:rPr>
-              <a:t>i</a:t>
-            </a:r>
-            <a:r>
-              <a:rPr sz="2400" b="0" i="0" dirty="0">
-                <a:solidFill>
-                  <a:srgbClr val="1A1A2E"/>
-                </a:solidFill>
-                <a:latin typeface="Calibri"/>
-              </a:rPr>
-              <a:t> system via </a:t>
-            </a:r>
-            <a:r>
-              <a:rPr sz="2400" b="1" i="0" dirty="0">
+              <a:t>Documentation is fetched live from the IBM i system via </a:t>
+            </a:r>
+            <a:r>
+              <a:rPr sz="1500" b="1" i="0">
                 <a:solidFill>
                   <a:srgbClr val="1F497D"/>
                 </a:solidFill>
                 <a:latin typeface="Calibri"/>
               </a:rPr>
-              <a:t>Code for IBM </a:t>
-            </a:r>
-            <a:r>
-              <a:rPr sz="2400" b="1" i="0" dirty="0" err="1">
-                <a:solidFill>
-                  <a:srgbClr val="1F497D"/>
-                </a:solidFill>
-                <a:latin typeface="Calibri"/>
-              </a:rPr>
-              <a:t>i</a:t>
-            </a:r>
-            <a:endParaRPr sz="2400" b="1" i="0" dirty="0">
-              <a:solidFill>
-                <a:srgbClr val="1F497D"/>
-              </a:solidFill>
-              <a:latin typeface="Calibri"/>
-            </a:endParaRPr>
+              <a:t>Code for IBM i</a:t>
+            </a:r>
           </a:p>
           <a:p>
             <a:pPr>
@@ -11715,7 +10782,7 @@
               </a:spcAft>
             </a:pPr>
             <a:r>
-              <a:rPr sz="2400" b="0" i="0" dirty="0">
+              <a:rPr sz="1500" b="0" i="0">
                 <a:solidFill>
                   <a:srgbClr val="1A1A2E"/>
                 </a:solidFill>
@@ -11724,7 +10791,7 @@
               <a:t>The </a:t>
             </a:r>
             <a:r>
-              <a:rPr sz="2400" b="0" i="0" dirty="0" err="1">
+              <a:rPr sz="1300" b="0" i="0">
                 <a:solidFill>
                   <a:srgbClr val="B5204F"/>
                 </a:solidFill>
@@ -11733,7 +10800,7 @@
               <a:t>vscode-clle.general.displayCommandDocumentation</a:t>
             </a:r>
             <a:r>
-              <a:rPr sz="2400" b="0" i="0" dirty="0">
+              <a:rPr sz="1500" b="0" i="0">
                 <a:solidFill>
                   <a:srgbClr val="1A1A2E"/>
                 </a:solidFill>
@@ -11752,31 +10819,13 @@
               </a:spcAft>
             </a:pPr>
             <a:r>
-              <a:rPr sz="2400" b="0" i="0" dirty="0">
+              <a:rPr sz="1500" b="0" i="0">
                 <a:solidFill>
                   <a:srgbClr val="1A1A2E"/>
                 </a:solidFill>
                 <a:latin typeface="Calibri"/>
               </a:rPr>
-              <a:t>Requires an active IBM </a:t>
-            </a:r>
-            <a:r>
-              <a:rPr sz="2400" b="0" i="0" dirty="0" err="1">
-                <a:solidFill>
-                  <a:srgbClr val="1A1A2E"/>
-                </a:solidFill>
-                <a:latin typeface="Calibri"/>
-              </a:rPr>
-              <a:t>i</a:t>
-            </a:r>
-            <a:r>
-              <a:rPr sz="2400" b="0" i="0" dirty="0">
-                <a:solidFill>
-                  <a:srgbClr val="1A1A2E"/>
-                </a:solidFill>
-                <a:latin typeface="Calibri"/>
-              </a:rPr>
-              <a:t> connection — shows nothing if offline</a:t>
+              <a:t>Requires an active IBM i connection — shows nothing if offline</a:t>
             </a:r>
           </a:p>
         </p:txBody>
@@ -11790,7 +10839,7 @@
 </file>
 
 <file path=ppt/slides/slide9.xml><?xml version="1.0" encoding="utf-8"?>
-<p:sld xmlns:a="http://schemas.openxmlformats.org/drawingml/2006/main" xmlns:r="http://schemas.openxmlformats.org/officeDocument/2006/relationships" xmlns:p="http://schemas.openxmlformats.org/presentationml/2006/main">
+<p:sld xmlns:a="http://schemas.openxmlformats.org/drawingml/2006/main" xmlns:p="http://schemas.openxmlformats.org/presentationml/2006/main" xmlns:r="http://schemas.openxmlformats.org/officeDocument/2006/relationships">
   <p:cSld>
     <p:spTree>
       <p:nvGrpSpPr>
@@ -11798,14 +10847,7 @@
         <p:cNvGrpSpPr/>
         <p:nvPr/>
       </p:nvGrpSpPr>
-      <p:grpSpPr>
-        <a:xfrm>
-          <a:off x="0" y="0"/>
-          <a:ext cx="0" cy="0"/>
-          <a:chOff x="0" y="0"/>
-          <a:chExt cx="0" cy="0"/>
-        </a:xfrm>
-      </p:grpSpPr>
+      <p:grpSpPr/>
       <p:sp>
         <p:nvSpPr>
           <p:cNvPr id="2" name="Title 1"/>
@@ -11845,9 +10887,7 @@
           </a:xfrm>
         </p:spPr>
         <p:txBody>
-          <a:bodyPr wrap="square" lIns="109728" tIns="91440" rIns="109728" bIns="91440">
-            <a:normAutofit/>
-          </a:bodyPr>
+          <a:bodyPr wrap="square" lIns="109728" rIns="109728" tIns="91440" bIns="91440"/>
           <a:lstStyle/>
           <a:p>
             <a:pPr>
@@ -11859,7 +10899,7 @@
               </a:spcAft>
             </a:pPr>
             <a:r>
-              <a:rPr sz="2400" b="0" i="0" dirty="0">
+              <a:rPr sz="1500" b="0" i="0">
                 <a:solidFill>
                   <a:srgbClr val="1A1A2E"/>
                 </a:solidFill>
@@ -11868,7 +10908,7 @@
               <a:t>Run the </a:t>
             </a:r>
             <a:r>
-              <a:rPr sz="2400" b="1" i="0" dirty="0">
+              <a:rPr sz="1500" b="1" i="0">
                 <a:solidFill>
                   <a:srgbClr val="1F497D"/>
                 </a:solidFill>
@@ -11877,7 +10917,7 @@
               <a:t>"Check CL Syntax"</a:t>
             </a:r>
             <a:r>
-              <a:rPr sz="2400" b="0" i="0" dirty="0">
+              <a:rPr sz="1500" b="0" i="0">
                 <a:solidFill>
                   <a:srgbClr val="1A1A2E"/>
                 </a:solidFill>
@@ -11896,7 +10936,7 @@
               </a:spcAft>
             </a:pPr>
             <a:r>
-              <a:rPr sz="2400" b="0" i="0" dirty="0">
+              <a:rPr sz="1500" b="0" i="0">
                 <a:solidFill>
                   <a:srgbClr val="1A1A2E"/>
                 </a:solidFill>
@@ -11905,7 +10945,7 @@
               <a:t>Validates the current </a:t>
             </a:r>
             <a:r>
-              <a:rPr sz="2400" b="0" i="0" dirty="0">
+              <a:rPr sz="1300" b="0" i="0">
                 <a:solidFill>
                   <a:srgbClr val="B5204F"/>
                 </a:solidFill>
@@ -11914,31 +10954,13 @@
               <a:t>.cl</a:t>
             </a:r>
             <a:r>
-              <a:rPr sz="2400" b="0" i="0" dirty="0">
+              <a:rPr sz="1500" b="0" i="0">
                 <a:solidFill>
                   <a:srgbClr val="1A1A2E"/>
                 </a:solidFill>
                 <a:latin typeface="Calibri"/>
               </a:rPr>
-              <a:t> source against the connected IBM </a:t>
-            </a:r>
-            <a:r>
-              <a:rPr sz="2400" b="0" i="0" dirty="0" err="1">
-                <a:solidFill>
-                  <a:srgbClr val="1A1A2E"/>
-                </a:solidFill>
-                <a:latin typeface="Calibri"/>
-              </a:rPr>
-              <a:t>i</a:t>
-            </a:r>
-            <a:r>
-              <a:rPr sz="2400" b="0" i="0" dirty="0">
-                <a:solidFill>
-                  <a:srgbClr val="1A1A2E"/>
-                </a:solidFill>
-                <a:latin typeface="Calibri"/>
-              </a:rPr>
-              <a:t> system</a:t>
+              <a:t> source against the connected IBM i system</a:t>
             </a:r>
           </a:p>
           <a:p>
@@ -11951,7 +10973,7 @@
               </a:spcAft>
             </a:pPr>
             <a:r>
-              <a:rPr sz="2400" b="0" i="0" dirty="0">
+              <a:rPr sz="1500" b="0" i="0">
                 <a:solidFill>
                   <a:srgbClr val="1A1A2E"/>
                 </a:solidFill>
@@ -11960,7 +10982,7 @@
               <a:t>Errors appear in the VS Code </a:t>
             </a:r>
             <a:r>
-              <a:rPr sz="2400" b="1" i="0" dirty="0">
+              <a:rPr sz="1500" b="1" i="0">
                 <a:solidFill>
                   <a:srgbClr val="1F497D"/>
                 </a:solidFill>
@@ -11969,7 +10991,7 @@
               <a:t>Problems</a:t>
             </a:r>
             <a:r>
-              <a:rPr sz="2400" b="0" i="0" dirty="0">
+              <a:rPr sz="1500" b="0" i="0">
                 <a:solidFill>
                   <a:srgbClr val="1A1A2E"/>
                 </a:solidFill>
@@ -11988,7 +11010,7 @@
               </a:spcAft>
             </a:pPr>
             <a:r>
-              <a:rPr sz="2400" b="0" i="0" dirty="0">
+              <a:rPr sz="1500" b="0" i="0">
                 <a:solidFill>
                   <a:srgbClr val="1A1A2E"/>
                 </a:solidFill>
@@ -11997,7 +11019,7 @@
               <a:t>Accessible from the </a:t>
             </a:r>
             <a:r>
-              <a:rPr sz="2400" b="1" i="0" dirty="0">
+              <a:rPr sz="1500" b="1" i="0">
                 <a:solidFill>
                   <a:srgbClr val="1F497D"/>
                 </a:solidFill>
@@ -12006,7 +11028,7 @@
               <a:t>Command Palette</a:t>
             </a:r>
             <a:r>
-              <a:rPr sz="2400" b="0" i="0" dirty="0">
+              <a:rPr sz="1500" b="0" i="0">
                 <a:solidFill>
                   <a:srgbClr val="1A1A2E"/>
                 </a:solidFill>
@@ -12015,7 +11037,7 @@
               <a:t>: </a:t>
             </a:r>
             <a:r>
-              <a:rPr sz="2400" b="0" i="0" dirty="0">
+              <a:rPr sz="1300" b="0" i="0">
                 <a:solidFill>
                   <a:srgbClr val="B5204F"/>
                 </a:solidFill>
@@ -12034,7 +11056,7 @@
               </a:spcAft>
             </a:pPr>
             <a:r>
-              <a:rPr sz="2400" b="0" i="0" dirty="0">
+              <a:rPr sz="1500" b="0" i="0">
                 <a:solidFill>
                   <a:srgbClr val="1A1A2E"/>
                 </a:solidFill>
@@ -12053,31 +11075,13 @@
               </a:spcAft>
             </a:pPr>
             <a:r>
-              <a:rPr sz="2400" b="0" i="0" dirty="0">
+              <a:rPr sz="1500" b="0" i="0">
                 <a:solidFill>
                   <a:srgbClr val="1A1A2E"/>
                 </a:solidFill>
                 <a:latin typeface="Calibri"/>
               </a:rPr>
-              <a:t>Requires an active Code for IBM </a:t>
-            </a:r>
-            <a:r>
-              <a:rPr sz="2400" b="0" i="0" dirty="0" err="1">
-                <a:solidFill>
-                  <a:srgbClr val="1A1A2E"/>
-                </a:solidFill>
-                <a:latin typeface="Calibri"/>
-              </a:rPr>
-              <a:t>i</a:t>
-            </a:r>
-            <a:r>
-              <a:rPr sz="2400" b="0" i="0" dirty="0">
-                <a:solidFill>
-                  <a:srgbClr val="1A1A2E"/>
-                </a:solidFill>
-                <a:latin typeface="Calibri"/>
-              </a:rPr>
-              <a:t> connection</a:t>
+              <a:t>Requires an active Code for IBM i connection</a:t>
             </a:r>
           </a:p>
         </p:txBody>
